--- a/final_group_project/final_documents/Final_LLM_Chatbot_Project_Presentation.pptx
+++ b/final_group_project/final_documents/Final_LLM_Chatbot_Project_Presentation.pptx
@@ -1,6 +1,6 @@
 
 <file path=ppt/presentation.xml><?xml version="1.0" encoding="utf-8"?>
-<p:presentation xmlns:a="http://schemas.openxmlformats.org/drawingml/2006/main" xmlns:p="http://schemas.openxmlformats.org/presentationml/2006/main" xmlns:r="http://schemas.openxmlformats.org/officeDocument/2006/relationships" autoCompressPictures="0" saveSubsetFonts="1">
+<p:presentation xmlns:a="http://schemas.openxmlformats.org/drawingml/2006/main" xmlns:r="http://schemas.openxmlformats.org/officeDocument/2006/relationships" xmlns:p="http://schemas.openxmlformats.org/presentationml/2006/main" saveSubsetFonts="1" autoCompressPictures="0">
   <p:sldMasterIdLst>
     <p:sldMasterId id="2147483648" r:id="rId1"/>
   </p:sldMasterIdLst>
@@ -22,8 +22,8 @@
     <a:defPPr>
       <a:defRPr lang="en-US"/>
     </a:defPPr>
-    <a:lvl1pPr algn="l" defTabSz="457200" eaLnBrk="1" hangingPunct="1" latinLnBrk="0" marL="0" rtl="0">
-      <a:defRPr kern="1200" sz="1800">
+    <a:lvl1pPr marL="0" algn="l" defTabSz="457200" rtl="0" eaLnBrk="1" latinLnBrk="0" hangingPunct="1">
+      <a:defRPr sz="1800" kern="1200">
         <a:solidFill>
           <a:schemeClr val="tx1"/>
         </a:solidFill>
@@ -32,8 +32,8 @@
         <a:cs typeface="+mn-cs"/>
       </a:defRPr>
     </a:lvl1pPr>
-    <a:lvl2pPr algn="l" defTabSz="457200" eaLnBrk="1" hangingPunct="1" latinLnBrk="0" marL="457200" rtl="0">
-      <a:defRPr kern="1200" sz="1800">
+    <a:lvl2pPr marL="457200" algn="l" defTabSz="457200" rtl="0" eaLnBrk="1" latinLnBrk="0" hangingPunct="1">
+      <a:defRPr sz="1800" kern="1200">
         <a:solidFill>
           <a:schemeClr val="tx1"/>
         </a:solidFill>
@@ -42,8 +42,8 @@
         <a:cs typeface="+mn-cs"/>
       </a:defRPr>
     </a:lvl2pPr>
-    <a:lvl3pPr algn="l" defTabSz="457200" eaLnBrk="1" hangingPunct="1" latinLnBrk="0" marL="914400" rtl="0">
-      <a:defRPr kern="1200" sz="1800">
+    <a:lvl3pPr marL="914400" algn="l" defTabSz="457200" rtl="0" eaLnBrk="1" latinLnBrk="0" hangingPunct="1">
+      <a:defRPr sz="1800" kern="1200">
         <a:solidFill>
           <a:schemeClr val="tx1"/>
         </a:solidFill>
@@ -52,8 +52,8 @@
         <a:cs typeface="+mn-cs"/>
       </a:defRPr>
     </a:lvl3pPr>
-    <a:lvl4pPr algn="l" defTabSz="457200" eaLnBrk="1" hangingPunct="1" latinLnBrk="0" marL="1371600" rtl="0">
-      <a:defRPr kern="1200" sz="1800">
+    <a:lvl4pPr marL="1371600" algn="l" defTabSz="457200" rtl="0" eaLnBrk="1" latinLnBrk="0" hangingPunct="1">
+      <a:defRPr sz="1800" kern="1200">
         <a:solidFill>
           <a:schemeClr val="tx1"/>
         </a:solidFill>
@@ -62,8 +62,8 @@
         <a:cs typeface="+mn-cs"/>
       </a:defRPr>
     </a:lvl4pPr>
-    <a:lvl5pPr algn="l" defTabSz="457200" eaLnBrk="1" hangingPunct="1" latinLnBrk="0" marL="1828800" rtl="0">
-      <a:defRPr kern="1200" sz="1800">
+    <a:lvl5pPr marL="1828800" algn="l" defTabSz="457200" rtl="0" eaLnBrk="1" latinLnBrk="0" hangingPunct="1">
+      <a:defRPr sz="1800" kern="1200">
         <a:solidFill>
           <a:schemeClr val="tx1"/>
         </a:solidFill>
@@ -72,8 +72,8 @@
         <a:cs typeface="+mn-cs"/>
       </a:defRPr>
     </a:lvl5pPr>
-    <a:lvl6pPr algn="l" defTabSz="457200" eaLnBrk="1" hangingPunct="1" latinLnBrk="0" marL="2286000" rtl="0">
-      <a:defRPr kern="1200" sz="1800">
+    <a:lvl6pPr marL="2286000" algn="l" defTabSz="457200" rtl="0" eaLnBrk="1" latinLnBrk="0" hangingPunct="1">
+      <a:defRPr sz="1800" kern="1200">
         <a:solidFill>
           <a:schemeClr val="tx1"/>
         </a:solidFill>
@@ -82,8 +82,8 @@
         <a:cs typeface="+mn-cs"/>
       </a:defRPr>
     </a:lvl6pPr>
-    <a:lvl7pPr algn="l" defTabSz="457200" eaLnBrk="1" hangingPunct="1" latinLnBrk="0" marL="2743200" rtl="0">
-      <a:defRPr kern="1200" sz="1800">
+    <a:lvl7pPr marL="2743200" algn="l" defTabSz="457200" rtl="0" eaLnBrk="1" latinLnBrk="0" hangingPunct="1">
+      <a:defRPr sz="1800" kern="1200">
         <a:solidFill>
           <a:schemeClr val="tx1"/>
         </a:solidFill>
@@ -92,8 +92,8 @@
         <a:cs typeface="+mn-cs"/>
       </a:defRPr>
     </a:lvl7pPr>
-    <a:lvl8pPr algn="l" defTabSz="457200" eaLnBrk="1" hangingPunct="1" latinLnBrk="0" marL="3200400" rtl="0">
-      <a:defRPr kern="1200" sz="1800">
+    <a:lvl8pPr marL="3200400" algn="l" defTabSz="457200" rtl="0" eaLnBrk="1" latinLnBrk="0" hangingPunct="1">
+      <a:defRPr sz="1800" kern="1200">
         <a:solidFill>
           <a:schemeClr val="tx1"/>
         </a:solidFill>
@@ -102,8 +102,8 @@
         <a:cs typeface="+mn-cs"/>
       </a:defRPr>
     </a:lvl8pPr>
-    <a:lvl9pPr algn="l" defTabSz="457200" eaLnBrk="1" hangingPunct="1" latinLnBrk="0" marL="3657600" rtl="0">
-      <a:defRPr kern="1200" sz="1800">
+    <a:lvl9pPr marL="3657600" algn="l" defTabSz="457200" rtl="0" eaLnBrk="1" latinLnBrk="0" hangingPunct="1">
+      <a:defRPr sz="1800" kern="1200">
         <a:solidFill>
           <a:schemeClr val="tx1"/>
         </a:solidFill>
@@ -311,7 +311,7 @@
           <a:p>
             <a:fld id="{241EB5C9-1307-BA42-ABA2-0BC069CD8E7F}" type="datetimeFigureOut">
               <a:rPr lang="en-US" smtClean="0"/>
-              <a:t>1/2/22</a:t>
+              <a:t>2/20/26</a:t>
             </a:fld>
             <a:endParaRPr lang="en-US"/>
           </a:p>
@@ -479,7 +479,7 @@
           <a:p>
             <a:fld id="{241EB5C9-1307-BA42-ABA2-0BC069CD8E7F}" type="datetimeFigureOut">
               <a:rPr lang="en-US" smtClean="0"/>
-              <a:t>1/2/22</a:t>
+              <a:t>2/20/26</a:t>
             </a:fld>
             <a:endParaRPr lang="en-US"/>
           </a:p>
@@ -657,7 +657,7 @@
           <a:p>
             <a:fld id="{241EB5C9-1307-BA42-ABA2-0BC069CD8E7F}" type="datetimeFigureOut">
               <a:rPr lang="en-US" smtClean="0"/>
-              <a:t>1/2/22</a:t>
+              <a:t>2/20/26</a:t>
             </a:fld>
             <a:endParaRPr lang="en-US"/>
           </a:p>
@@ -825,7 +825,7 @@
           <a:p>
             <a:fld id="{241EB5C9-1307-BA42-ABA2-0BC069CD8E7F}" type="datetimeFigureOut">
               <a:rPr lang="en-US" smtClean="0"/>
-              <a:t>1/2/22</a:t>
+              <a:t>2/20/26</a:t>
             </a:fld>
             <a:endParaRPr lang="en-US"/>
           </a:p>
@@ -1070,7 +1070,7 @@
           <a:p>
             <a:fld id="{241EB5C9-1307-BA42-ABA2-0BC069CD8E7F}" type="datetimeFigureOut">
               <a:rPr lang="en-US" smtClean="0"/>
-              <a:t>1/2/22</a:t>
+              <a:t>2/20/26</a:t>
             </a:fld>
             <a:endParaRPr lang="en-US"/>
           </a:p>
@@ -1355,7 +1355,7 @@
           <a:p>
             <a:fld id="{241EB5C9-1307-BA42-ABA2-0BC069CD8E7F}" type="datetimeFigureOut">
               <a:rPr lang="en-US" smtClean="0"/>
-              <a:t>1/2/22</a:t>
+              <a:t>2/20/26</a:t>
             </a:fld>
             <a:endParaRPr lang="en-US"/>
           </a:p>
@@ -1774,7 +1774,7 @@
           <a:p>
             <a:fld id="{241EB5C9-1307-BA42-ABA2-0BC069CD8E7F}" type="datetimeFigureOut">
               <a:rPr lang="en-US" smtClean="0"/>
-              <a:t>1/2/22</a:t>
+              <a:t>2/20/26</a:t>
             </a:fld>
             <a:endParaRPr lang="en-US"/>
           </a:p>
@@ -1891,7 +1891,7 @@
           <a:p>
             <a:fld id="{241EB5C9-1307-BA42-ABA2-0BC069CD8E7F}" type="datetimeFigureOut">
               <a:rPr lang="en-US" smtClean="0"/>
-              <a:t>1/2/22</a:t>
+              <a:t>2/20/26</a:t>
             </a:fld>
             <a:endParaRPr lang="en-US"/>
           </a:p>
@@ -1986,7 +1986,7 @@
           <a:p>
             <a:fld id="{241EB5C9-1307-BA42-ABA2-0BC069CD8E7F}" type="datetimeFigureOut">
               <a:rPr lang="en-US" smtClean="0"/>
-              <a:t>1/2/22</a:t>
+              <a:t>2/20/26</a:t>
             </a:fld>
             <a:endParaRPr lang="en-US"/>
           </a:p>
@@ -2261,7 +2261,7 @@
           <a:p>
             <a:fld id="{241EB5C9-1307-BA42-ABA2-0BC069CD8E7F}" type="datetimeFigureOut">
               <a:rPr lang="en-US" smtClean="0"/>
-              <a:t>1/2/22</a:t>
+              <a:t>2/20/26</a:t>
             </a:fld>
             <a:endParaRPr lang="en-US"/>
           </a:p>
@@ -2513,7 +2513,7 @@
           <a:p>
             <a:fld id="{241EB5C9-1307-BA42-ABA2-0BC069CD8E7F}" type="datetimeFigureOut">
               <a:rPr lang="en-US" smtClean="0"/>
-              <a:t>1/2/22</a:t>
+              <a:t>2/20/26</a:t>
             </a:fld>
             <a:endParaRPr lang="en-US"/>
           </a:p>
@@ -2575,7 +2575,7 @@
 </file>
 
 <file path=ppt/slideMasters/slideMaster1.xml><?xml version="1.0" encoding="utf-8"?>
-<p:sldMaster xmlns:a="http://schemas.openxmlformats.org/drawingml/2006/main" xmlns:p="http://schemas.openxmlformats.org/presentationml/2006/main" xmlns:r="http://schemas.openxmlformats.org/officeDocument/2006/relationships">
+<p:sldMaster xmlns:a="http://schemas.openxmlformats.org/drawingml/2006/main" xmlns:r="http://schemas.openxmlformats.org/officeDocument/2006/relationships" xmlns:p="http://schemas.openxmlformats.org/presentationml/2006/main">
   <p:cSld>
     <p:bg>
       <p:bgRef idx="1001">
@@ -2616,7 +2616,7 @@
           </a:prstGeom>
         </p:spPr>
         <p:txBody>
-          <a:bodyPr anchor="ctr" bIns="45720" lIns="91440" rIns="91440" rtlCol="0" tIns="45720" vert="horz">
+          <a:bodyPr vert="horz" lIns="91440" tIns="45720" rIns="91440" bIns="45720" rtlCol="0" anchor="ctr">
             <a:normAutofit/>
           </a:bodyPr>
           <a:lstStyle/>
@@ -2635,7 +2635,7 @@
             <a:spLocks noGrp="1"/>
           </p:cNvSpPr>
           <p:nvPr>
-            <p:ph idx="1" type="body"/>
+            <p:ph type="body" idx="1"/>
           </p:nvPr>
         </p:nvSpPr>
         <p:spPr>
@@ -2648,7 +2648,7 @@
           </a:prstGeom>
         </p:spPr>
         <p:txBody>
-          <a:bodyPr bIns="45720" lIns="91440" rIns="91440" rtlCol="0" tIns="45720" vert="horz">
+          <a:bodyPr vert="horz" lIns="91440" tIns="45720" rIns="91440" bIns="45720" rtlCol="0">
             <a:normAutofit/>
           </a:bodyPr>
           <a:lstStyle/>
@@ -2696,7 +2696,7 @@
             <a:spLocks noGrp="1"/>
           </p:cNvSpPr>
           <p:nvPr>
-            <p:ph idx="2" sz="half" type="dt"/>
+            <p:ph type="dt" sz="half" idx="2"/>
           </p:nvPr>
         </p:nvSpPr>
         <p:spPr>
@@ -2709,7 +2709,7 @@
           </a:prstGeom>
         </p:spPr>
         <p:txBody>
-          <a:bodyPr anchor="ctr" bIns="45720" lIns="91440" rIns="91440" rtlCol="0" tIns="45720" vert="horz"/>
+          <a:bodyPr vert="horz" lIns="91440" tIns="45720" rIns="91440" bIns="45720" rtlCol="0" anchor="ctr"/>
           <a:lstStyle>
             <a:lvl1pPr algn="l">
               <a:defRPr sz="900">
@@ -2724,7 +2724,7 @@
           <a:p>
             <a:fld id="{241EB5C9-1307-BA42-ABA2-0BC069CD8E7F}" type="datetimeFigureOut">
               <a:rPr lang="en-US" smtClean="0"/>
-              <a:t>1/2/22</a:t>
+              <a:t>2/20/26</a:t>
             </a:fld>
             <a:endParaRPr lang="en-US"/>
           </a:p>
@@ -2737,7 +2737,7 @@
             <a:spLocks noGrp="1"/>
           </p:cNvSpPr>
           <p:nvPr>
-            <p:ph idx="3" sz="quarter" type="ftr"/>
+            <p:ph type="ftr" sz="quarter" idx="3"/>
           </p:nvPr>
         </p:nvSpPr>
         <p:spPr>
@@ -2750,7 +2750,7 @@
           </a:prstGeom>
         </p:spPr>
         <p:txBody>
-          <a:bodyPr anchor="ctr" bIns="45720" lIns="91440" rIns="91440" rtlCol="0" tIns="45720" vert="horz"/>
+          <a:bodyPr vert="horz" lIns="91440" tIns="45720" rIns="91440" bIns="45720" rtlCol="0" anchor="ctr"/>
           <a:lstStyle>
             <a:lvl1pPr algn="ctr">
               <a:defRPr sz="900">
@@ -2774,7 +2774,7 @@
             <a:spLocks noGrp="1"/>
           </p:cNvSpPr>
           <p:nvPr>
-            <p:ph idx="4" sz="quarter" type="sldNum"/>
+            <p:ph type="sldNum" sz="quarter" idx="4"/>
           </p:nvPr>
         </p:nvSpPr>
         <p:spPr>
@@ -2787,7 +2787,7 @@
           </a:prstGeom>
         </p:spPr>
         <p:txBody>
-          <a:bodyPr anchor="ctr" bIns="45720" lIns="91440" rIns="91440" rtlCol="0" tIns="45720" vert="horz"/>
+          <a:bodyPr vert="horz" lIns="91440" tIns="45720" rIns="91440" bIns="45720" rtlCol="0" anchor="ctr"/>
           <a:lstStyle>
             <a:lvl1pPr algn="r">
               <a:defRPr sz="900">
@@ -2815,7 +2815,7 @@
       </p:ext>
     </p:extLst>
   </p:cSld>
-  <p:clrMap accent1="accent1" accent2="accent2" accent3="accent3" accent4="accent4" accent5="accent5" accent6="accent6" bg1="lt1" bg2="lt2" folHlink="folHlink" hlink="hlink" tx1="dk1" tx2="dk2"/>
+  <p:clrMap bg1="lt1" tx1="dk1" bg2="lt2" tx2="dk2" accent1="accent1" accent2="accent2" accent3="accent3" accent4="accent4" accent5="accent5" accent6="accent6" hlink="hlink" folHlink="folHlink"/>
   <p:sldLayoutIdLst>
     <p:sldLayoutId id="2147483649" r:id="rId1"/>
     <p:sldLayoutId id="2147483650" r:id="rId2"/>
@@ -2831,12 +2831,12 @@
   </p:sldLayoutIdLst>
   <p:txStyles>
     <p:titleStyle>
-      <a:lvl1pPr algn="ctr" defTabSz="342900" eaLnBrk="1" hangingPunct="1" latinLnBrk="0" rtl="0">
+      <a:lvl1pPr algn="ctr" defTabSz="342900" rtl="0" eaLnBrk="1" latinLnBrk="0" hangingPunct="1">
         <a:spcBef>
           <a:spcPct val="0"/>
         </a:spcBef>
         <a:buNone/>
-        <a:defRPr kern="1200" sz="3300">
+        <a:defRPr sz="3300" kern="1200">
           <a:solidFill>
             <a:schemeClr val="tx1"/>
           </a:solidFill>
@@ -2847,13 +2847,13 @@
       </a:lvl1pPr>
     </p:titleStyle>
     <p:bodyStyle>
-      <a:lvl1pPr algn="l" defTabSz="342900" eaLnBrk="1" hangingPunct="1" indent="-342900" latinLnBrk="0" marL="342900" rtl="0">
+      <a:lvl1pPr marL="342900" indent="-342900" algn="l" defTabSz="342900" rtl="0" eaLnBrk="1" latinLnBrk="0" hangingPunct="1">
         <a:spcBef>
           <a:spcPct val="20000"/>
         </a:spcBef>
         <a:buFont typeface="Arial"/>
         <a:buChar char="•"/>
-        <a:defRPr kern="1200" sz="2400">
+        <a:defRPr sz="2400" kern="1200">
           <a:solidFill>
             <a:schemeClr val="tx1"/>
           </a:solidFill>
@@ -2862,13 +2862,13 @@
           <a:cs typeface="+mn-cs"/>
         </a:defRPr>
       </a:lvl1pPr>
-      <a:lvl2pPr algn="l" defTabSz="342900" eaLnBrk="1" hangingPunct="1" indent="-342900" latinLnBrk="0" marL="685800" rtl="0">
+      <a:lvl2pPr marL="685800" indent="-342900" algn="l" defTabSz="342900" rtl="0" eaLnBrk="1" latinLnBrk="0" hangingPunct="1">
         <a:spcBef>
           <a:spcPct val="20000"/>
         </a:spcBef>
         <a:buFont typeface="Arial"/>
         <a:buChar char="–"/>
-        <a:defRPr kern="1200" sz="2100">
+        <a:defRPr sz="2100" kern="1200">
           <a:solidFill>
             <a:schemeClr val="tx1"/>
           </a:solidFill>
@@ -2877,13 +2877,13 @@
           <a:cs typeface="+mn-cs"/>
         </a:defRPr>
       </a:lvl2pPr>
-      <a:lvl3pPr algn="l" defTabSz="342900" eaLnBrk="1" hangingPunct="1" indent="-342900" latinLnBrk="0" marL="1028700" rtl="0">
+      <a:lvl3pPr marL="1028700" indent="-342900" algn="l" defTabSz="342900" rtl="0" eaLnBrk="1" latinLnBrk="0" hangingPunct="1">
         <a:spcBef>
           <a:spcPct val="20000"/>
         </a:spcBef>
         <a:buFont typeface="Arial"/>
         <a:buChar char="•"/>
-        <a:defRPr kern="1200" sz="1800">
+        <a:defRPr sz="1800" kern="1200">
           <a:solidFill>
             <a:schemeClr val="tx1"/>
           </a:solidFill>
@@ -2892,13 +2892,13 @@
           <a:cs typeface="+mn-cs"/>
         </a:defRPr>
       </a:lvl3pPr>
-      <a:lvl4pPr algn="l" defTabSz="342900" eaLnBrk="1" hangingPunct="1" indent="-342900" latinLnBrk="0" marL="1371600" rtl="0">
+      <a:lvl4pPr marL="1371600" indent="-342900" algn="l" defTabSz="342900" rtl="0" eaLnBrk="1" latinLnBrk="0" hangingPunct="1">
         <a:spcBef>
           <a:spcPct val="20000"/>
         </a:spcBef>
         <a:buFont typeface="Arial"/>
         <a:buChar char="–"/>
-        <a:defRPr kern="1200" sz="1500">
+        <a:defRPr sz="1500" kern="1200">
           <a:solidFill>
             <a:schemeClr val="tx1"/>
           </a:solidFill>
@@ -2907,13 +2907,13 @@
           <a:cs typeface="+mn-cs"/>
         </a:defRPr>
       </a:lvl4pPr>
-      <a:lvl5pPr algn="l" defTabSz="342900" eaLnBrk="1" hangingPunct="1" indent="-342900" latinLnBrk="0" marL="1714500" rtl="0">
+      <a:lvl5pPr marL="1714500" indent="-342900" algn="l" defTabSz="342900" rtl="0" eaLnBrk="1" latinLnBrk="0" hangingPunct="1">
         <a:spcBef>
           <a:spcPct val="20000"/>
         </a:spcBef>
         <a:buFont typeface="Arial"/>
         <a:buChar char="»"/>
-        <a:defRPr kern="1200" sz="1500">
+        <a:defRPr sz="1500" kern="1200">
           <a:solidFill>
             <a:schemeClr val="tx1"/>
           </a:solidFill>
@@ -2922,13 +2922,13 @@
           <a:cs typeface="+mn-cs"/>
         </a:defRPr>
       </a:lvl5pPr>
-      <a:lvl6pPr algn="l" defTabSz="342900" eaLnBrk="1" hangingPunct="1" indent="-342900" latinLnBrk="0" marL="2057400" rtl="0">
+      <a:lvl6pPr marL="2057400" indent="-342900" algn="l" defTabSz="342900" rtl="0" eaLnBrk="1" latinLnBrk="0" hangingPunct="1">
         <a:spcBef>
           <a:spcPct val="20000"/>
         </a:spcBef>
         <a:buFont typeface="Arial"/>
         <a:buChar char="•"/>
-        <a:defRPr kern="1200" sz="1500">
+        <a:defRPr sz="1500" kern="1200">
           <a:solidFill>
             <a:schemeClr val="tx1"/>
           </a:solidFill>
@@ -2937,13 +2937,13 @@
           <a:cs typeface="+mn-cs"/>
         </a:defRPr>
       </a:lvl6pPr>
-      <a:lvl7pPr algn="l" defTabSz="342900" eaLnBrk="1" hangingPunct="1" indent="-342900" latinLnBrk="0" marL="2400300" rtl="0">
+      <a:lvl7pPr marL="2400300" indent="-342900" algn="l" defTabSz="342900" rtl="0" eaLnBrk="1" latinLnBrk="0" hangingPunct="1">
         <a:spcBef>
           <a:spcPct val="20000"/>
         </a:spcBef>
         <a:buFont typeface="Arial"/>
         <a:buChar char="•"/>
-        <a:defRPr kern="1200" sz="1500">
+        <a:defRPr sz="1500" kern="1200">
           <a:solidFill>
             <a:schemeClr val="tx1"/>
           </a:solidFill>
@@ -2952,13 +2952,13 @@
           <a:cs typeface="+mn-cs"/>
         </a:defRPr>
       </a:lvl7pPr>
-      <a:lvl8pPr algn="l" defTabSz="342900" eaLnBrk="1" hangingPunct="1" indent="-342900" latinLnBrk="0" marL="2743200" rtl="0">
+      <a:lvl8pPr marL="2743200" indent="-342900" algn="l" defTabSz="342900" rtl="0" eaLnBrk="1" latinLnBrk="0" hangingPunct="1">
         <a:spcBef>
           <a:spcPct val="20000"/>
         </a:spcBef>
         <a:buFont typeface="Arial"/>
         <a:buChar char="•"/>
-        <a:defRPr kern="1200" sz="1500">
+        <a:defRPr sz="1500" kern="1200">
           <a:solidFill>
             <a:schemeClr val="tx1"/>
           </a:solidFill>
@@ -2967,13 +2967,13 @@
           <a:cs typeface="+mn-cs"/>
         </a:defRPr>
       </a:lvl8pPr>
-      <a:lvl9pPr algn="l" defTabSz="342900" eaLnBrk="1" hangingPunct="1" indent="-342900" latinLnBrk="0" marL="3086100" rtl="0">
+      <a:lvl9pPr marL="3086100" indent="-342900" algn="l" defTabSz="342900" rtl="0" eaLnBrk="1" latinLnBrk="0" hangingPunct="1">
         <a:spcBef>
           <a:spcPct val="20000"/>
         </a:spcBef>
         <a:buFont typeface="Arial"/>
         <a:buChar char="•"/>
-        <a:defRPr kern="1200" sz="1500">
+        <a:defRPr sz="1500" kern="1200">
           <a:solidFill>
             <a:schemeClr val="tx1"/>
           </a:solidFill>
@@ -2987,8 +2987,8 @@
       <a:defPPr>
         <a:defRPr lang="en-US"/>
       </a:defPPr>
-      <a:lvl1pPr algn="l" defTabSz="342900" eaLnBrk="1" hangingPunct="1" latinLnBrk="0" marL="0" rtl="0">
-        <a:defRPr kern="1200" sz="1350">
+      <a:lvl1pPr marL="0" algn="l" defTabSz="342900" rtl="0" eaLnBrk="1" latinLnBrk="0" hangingPunct="1">
+        <a:defRPr sz="1350" kern="1200">
           <a:solidFill>
             <a:schemeClr val="tx1"/>
           </a:solidFill>
@@ -2997,8 +2997,8 @@
           <a:cs typeface="+mn-cs"/>
         </a:defRPr>
       </a:lvl1pPr>
-      <a:lvl2pPr algn="l" defTabSz="342900" eaLnBrk="1" hangingPunct="1" latinLnBrk="0" marL="342900" rtl="0">
-        <a:defRPr kern="1200" sz="1350">
+      <a:lvl2pPr marL="342900" algn="l" defTabSz="342900" rtl="0" eaLnBrk="1" latinLnBrk="0" hangingPunct="1">
+        <a:defRPr sz="1350" kern="1200">
           <a:solidFill>
             <a:schemeClr val="tx1"/>
           </a:solidFill>
@@ -3007,8 +3007,8 @@
           <a:cs typeface="+mn-cs"/>
         </a:defRPr>
       </a:lvl2pPr>
-      <a:lvl3pPr algn="l" defTabSz="342900" eaLnBrk="1" hangingPunct="1" latinLnBrk="0" marL="685800" rtl="0">
-        <a:defRPr kern="1200" sz="1350">
+      <a:lvl3pPr marL="685800" algn="l" defTabSz="342900" rtl="0" eaLnBrk="1" latinLnBrk="0" hangingPunct="1">
+        <a:defRPr sz="1350" kern="1200">
           <a:solidFill>
             <a:schemeClr val="tx1"/>
           </a:solidFill>
@@ -3017,8 +3017,8 @@
           <a:cs typeface="+mn-cs"/>
         </a:defRPr>
       </a:lvl3pPr>
-      <a:lvl4pPr algn="l" defTabSz="342900" eaLnBrk="1" hangingPunct="1" latinLnBrk="0" marL="1028700" rtl="0">
-        <a:defRPr kern="1200" sz="1350">
+      <a:lvl4pPr marL="1028700" algn="l" defTabSz="342900" rtl="0" eaLnBrk="1" latinLnBrk="0" hangingPunct="1">
+        <a:defRPr sz="1350" kern="1200">
           <a:solidFill>
             <a:schemeClr val="tx1"/>
           </a:solidFill>
@@ -3027,8 +3027,8 @@
           <a:cs typeface="+mn-cs"/>
         </a:defRPr>
       </a:lvl4pPr>
-      <a:lvl5pPr algn="l" defTabSz="342900" eaLnBrk="1" hangingPunct="1" latinLnBrk="0" marL="1371600" rtl="0">
-        <a:defRPr kern="1200" sz="1350">
+      <a:lvl5pPr marL="1371600" algn="l" defTabSz="342900" rtl="0" eaLnBrk="1" latinLnBrk="0" hangingPunct="1">
+        <a:defRPr sz="1350" kern="1200">
           <a:solidFill>
             <a:schemeClr val="tx1"/>
           </a:solidFill>
@@ -3037,8 +3037,8 @@
           <a:cs typeface="+mn-cs"/>
         </a:defRPr>
       </a:lvl5pPr>
-      <a:lvl6pPr algn="l" defTabSz="342900" eaLnBrk="1" hangingPunct="1" latinLnBrk="0" marL="1714500" rtl="0">
-        <a:defRPr kern="1200" sz="1350">
+      <a:lvl6pPr marL="1714500" algn="l" defTabSz="342900" rtl="0" eaLnBrk="1" latinLnBrk="0" hangingPunct="1">
+        <a:defRPr sz="1350" kern="1200">
           <a:solidFill>
             <a:schemeClr val="tx1"/>
           </a:solidFill>
@@ -3047,8 +3047,8 @@
           <a:cs typeface="+mn-cs"/>
         </a:defRPr>
       </a:lvl6pPr>
-      <a:lvl7pPr algn="l" defTabSz="342900" eaLnBrk="1" hangingPunct="1" latinLnBrk="0" marL="2057400" rtl="0">
-        <a:defRPr kern="1200" sz="1350">
+      <a:lvl7pPr marL="2057400" algn="l" defTabSz="342900" rtl="0" eaLnBrk="1" latinLnBrk="0" hangingPunct="1">
+        <a:defRPr sz="1350" kern="1200">
           <a:solidFill>
             <a:schemeClr val="tx1"/>
           </a:solidFill>
@@ -3057,8 +3057,8 @@
           <a:cs typeface="+mn-cs"/>
         </a:defRPr>
       </a:lvl7pPr>
-      <a:lvl8pPr algn="l" defTabSz="342900" eaLnBrk="1" hangingPunct="1" latinLnBrk="0" marL="2400300" rtl="0">
-        <a:defRPr kern="1200" sz="1350">
+      <a:lvl8pPr marL="2400300" algn="l" defTabSz="342900" rtl="0" eaLnBrk="1" latinLnBrk="0" hangingPunct="1">
+        <a:defRPr sz="1350" kern="1200">
           <a:solidFill>
             <a:schemeClr val="tx1"/>
           </a:solidFill>
@@ -3067,8 +3067,8 @@
           <a:cs typeface="+mn-cs"/>
         </a:defRPr>
       </a:lvl8pPr>
-      <a:lvl9pPr algn="l" defTabSz="342900" eaLnBrk="1" hangingPunct="1" latinLnBrk="0" marL="2743200" rtl="0">
-        <a:defRPr kern="1200" sz="1350">
+      <a:lvl9pPr marL="2743200" algn="l" defTabSz="342900" rtl="0" eaLnBrk="1" latinLnBrk="0" hangingPunct="1">
+        <a:defRPr sz="1350" kern="1200">
           <a:solidFill>
             <a:schemeClr val="tx1"/>
           </a:solidFill>
@@ -3083,1155 +3083,1162 @@
 </file>
 
 <file path=ppt/slides/slide1.xml><?xml version="1.0" encoding="utf-8"?>
-<ns0:sld xmlns:ns0="http://schemas.openxmlformats.org/presentationml/2006/main" xmlns:ns1="http://schemas.openxmlformats.org/drawingml/2006/main">
-  <ns0:cSld>
-    <ns0:spTree>
-      <ns0:nvGrpSpPr>
-        <ns0:cNvPr id="1" name=""/>
-        <ns0:cNvGrpSpPr/>
-        <ns0:nvPr/>
-      </ns0:nvGrpSpPr>
-      <ns0:grpSpPr>
-        <ns1:xfrm>
-          <ns1:off x="0" y="0"/>
-          <ns1:ext cx="0" cy="0"/>
-          <ns1:chOff x="0" y="0"/>
-          <ns1:chExt cx="0" cy="0"/>
-        </ns1:xfrm>
-      </ns0:grpSpPr>
-      <ns0:sp>
-        <ns0:nvSpPr>
-          <ns0:cNvPr id="2" name="Title 1"/>
-          <ns0:cNvSpPr>
-            <ns1:spLocks noGrp="1"/>
-          </ns0:cNvSpPr>
-          <ns0:nvPr>
-            <ns0:ph type="ctrTitle"/>
-          </ns0:nvPr>
-        </ns0:nvSpPr>
-        <ns0:spPr>
-          <ns1:xfrm>
-            <ns1:off x="685800" y="1597819"/>
-            <ns1:ext cx="7772400" cy="1102519"/>
-          </ns1:xfrm>
-        </ns0:spPr>
-        <ns0:txBody>
-          <ns1:bodyPr/>
-          <ns1:lstStyle/>
-          <ns1:p>
-            <ns1:pPr lvl="0" indent="0" marL="0">
-              <ns1:buNone/>
-            </ns1:pPr>
-            <ns1:r>
-              <ns1:rPr/>
-              <ns1:t>Final LLM Chatbot Project</ns1:t>
-            </ns1:r>
-          </ns1:p>
-        </ns0:txBody>
-      </ns0:sp>
-      <ns0:sp>
-        <ns0:nvSpPr>
-          <ns0:cNvPr id="3" name="Subtitle 2"/>
-          <ns0:cNvSpPr>
-            <ns1:spLocks noGrp="1"/>
-          </ns0:cNvSpPr>
-          <ns0:nvPr>
-            <ns0:ph idx="1" type="subTitle"/>
-          </ns0:nvPr>
-        </ns0:nvSpPr>
-        <ns0:spPr>
-          <ns1:xfrm>
-            <ns1:off x="1371600" y="2914650"/>
-            <ns1:ext cx="6400800" cy="1314450"/>
-          </ns1:xfrm>
-        </ns0:spPr>
-        <ns0:txBody>
-          <ns1:bodyPr/>
-          <ns1:lstStyle/>
-          <ns1:p>
-            <ns1:pPr lvl="0" indent="0" marL="0">
-              <ns1:buNone/>
-            </ns1:pPr>
-            <ns1:br/>
-            <ns1:br/>
-            <ns1:r>
-              <ns1:rPr/>
-              <ns1:t>Design, Scope, Challenges, Learnings</ns1:t>
-            </ns1:r>
-          </ns1:p>
-        </ns0:txBody>
-      </ns0:sp>
-      <ns0:sp>
-        <ns0:nvSpPr>
-          <ns0:cNvPr id="4" name="Date Placeholder 3"/>
-          <ns0:cNvSpPr>
-            <ns1:spLocks noGrp="1"/>
-          </ns0:cNvSpPr>
-          <ns0:nvPr>
-            <ns0:ph idx="10" sz="half" type="dt"/>
-          </ns0:nvPr>
-        </ns0:nvSpPr>
-        <ns0:spPr/>
-        <ns0:txBody>
-          <ns1:bodyPr/>
-          <ns1:lstStyle/>
-          <ns1:p>
-            <ns1:pPr lvl="0" indent="0" marL="0">
-              <ns1:buNone/>
-            </ns1:pPr>
-            <ns1:r>
-              <ns1:rPr/>
-              <ns1:t>February 20, 2026</ns1:t>
-            </ns1:r>
-          </ns1:p>
-        </ns0:txBody>
-      </ns0:sp>
-    </ns0:spTree>
-  </ns0:cSld>
-</ns0:sld>
+<p:sld xmlns:a="http://schemas.openxmlformats.org/drawingml/2006/main" xmlns:r="http://schemas.openxmlformats.org/officeDocument/2006/relationships" xmlns:p="http://schemas.openxmlformats.org/presentationml/2006/main">
+  <p:cSld>
+    <p:spTree>
+      <p:nvGrpSpPr>
+        <p:cNvPr id="1" name=""/>
+        <p:cNvGrpSpPr/>
+        <p:nvPr/>
+      </p:nvGrpSpPr>
+      <p:grpSpPr>
+        <a:xfrm>
+          <a:off x="0" y="0"/>
+          <a:ext cx="0" cy="0"/>
+          <a:chOff x="0" y="0"/>
+          <a:chExt cx="0" cy="0"/>
+        </a:xfrm>
+      </p:grpSpPr>
+      <p:sp>
+        <p:nvSpPr>
+          <p:cNvPr id="2" name="Title 1"/>
+          <p:cNvSpPr>
+            <a:spLocks noGrp="1"/>
+          </p:cNvSpPr>
+          <p:nvPr>
+            <p:ph type="ctrTitle"/>
+          </p:nvPr>
+        </p:nvSpPr>
+        <p:spPr>
+          <a:xfrm>
+            <a:off x="685800" y="1597819"/>
+            <a:ext cx="7772400" cy="1102519"/>
+          </a:xfrm>
+        </p:spPr>
+        <p:txBody>
+          <a:bodyPr/>
+          <a:lstStyle/>
+          <a:p>
+            <a:pPr marL="0" lvl="0" indent="0">
+              <a:buNone/>
+            </a:pPr>
+            <a:r>
+              <a:t>Final LLM Chatbot Project</a:t>
+            </a:r>
+          </a:p>
+        </p:txBody>
+      </p:sp>
+      <p:sp>
+        <p:nvSpPr>
+          <p:cNvPr id="3" name="Subtitle 2"/>
+          <p:cNvSpPr>
+            <a:spLocks noGrp="1"/>
+          </p:cNvSpPr>
+          <p:nvPr>
+            <p:ph type="subTitle" idx="1"/>
+          </p:nvPr>
+        </p:nvSpPr>
+        <p:spPr>
+          <a:xfrm>
+            <a:off x="1371600" y="2914650"/>
+            <a:ext cx="6400800" cy="1314450"/>
+          </a:xfrm>
+        </p:spPr>
+        <p:txBody>
+          <a:bodyPr/>
+          <a:lstStyle/>
+          <a:p>
+            <a:pPr marL="0" lvl="0" indent="0">
+              <a:buNone/>
+            </a:pPr>
+            <a:br/>
+            <a:br/>
+            <a:r>
+              <a:t>Design, Scope, Challenges, Learnings</a:t>
+            </a:r>
+          </a:p>
+        </p:txBody>
+      </p:sp>
+      <p:sp>
+        <p:nvSpPr>
+          <p:cNvPr id="4" name="Date Placeholder 3"/>
+          <p:cNvSpPr>
+            <a:spLocks noGrp="1"/>
+          </p:cNvSpPr>
+          <p:nvPr>
+            <p:ph type="dt" sz="half" idx="10"/>
+          </p:nvPr>
+        </p:nvSpPr>
+        <p:spPr/>
+        <p:txBody>
+          <a:bodyPr/>
+          <a:lstStyle/>
+          <a:p>
+            <a:pPr marL="0" lvl="0" indent="0">
+              <a:buNone/>
+            </a:pPr>
+            <a:r>
+              <a:t>February 20, 2026</a:t>
+            </a:r>
+          </a:p>
+        </p:txBody>
+      </p:sp>
+    </p:spTree>
+  </p:cSld>
+  <p:clrMapOvr>
+    <a:masterClrMapping/>
+  </p:clrMapOvr>
+</p:sld>
 </file>
 
 <file path=ppt/slides/slide10.xml><?xml version="1.0" encoding="utf-8"?>
-<ns0:sld xmlns:ns0="http://schemas.openxmlformats.org/presentationml/2006/main" xmlns:ns1="http://schemas.openxmlformats.org/drawingml/2006/main">
-  <ns0:cSld>
-    <ns0:spTree>
-      <ns0:nvGrpSpPr>
-        <ns0:cNvPr id="1" name=""/>
-        <ns0:cNvGrpSpPr/>
-        <ns0:nvPr/>
-      </ns0:nvGrpSpPr>
-      <ns0:grpSpPr>
-        <ns1:xfrm>
-          <ns1:off x="0" y="0"/>
-          <ns1:ext cx="0" cy="0"/>
-          <ns1:chOff x="0" y="0"/>
-          <ns1:chExt cx="0" cy="0"/>
-        </ns1:xfrm>
-      </ns0:grpSpPr>
-      <ns0:sp>
-        <ns0:nvSpPr>
-          <ns0:cNvPr id="2" name="Title 1"/>
-          <ns0:cNvSpPr>
-            <ns1:spLocks noGrp="1"/>
-          </ns0:cNvSpPr>
-          <ns0:nvPr>
-            <ns0:ph type="title"/>
-          </ns0:nvPr>
-        </ns0:nvSpPr>
-        <ns0:spPr/>
-        <ns0:txBody>
-          <ns1:bodyPr/>
-          <ns1:lstStyle/>
-          <ns1:p>
-            <ns1:pPr lvl="0" indent="0" marL="0">
-              <ns1:buNone/>
-            </ns1:pPr>
-            <ns1:r>
-              <ns1:rPr/>
-              <ns1:t>Conclusion and Next Steps</ns1:t>
-            </ns1:r>
-          </ns1:p>
-        </ns0:txBody>
-      </ns0:sp>
-      <ns0:sp>
-        <ns0:nvSpPr>
-          <ns0:cNvPr id="3" name="Content Placeholder 2"/>
-          <ns0:cNvSpPr>
-            <ns1:spLocks noGrp="1"/>
-          </ns0:cNvSpPr>
-          <ns0:nvPr>
-            <ns0:ph idx="1"/>
-          </ns0:nvPr>
-        </ns0:nvSpPr>
-        <ns0:spPr/>
-        <ns0:txBody>
-          <ns1:bodyPr/>
-          <ns1:lstStyle/>
-          <ns1:p>
-            <ns1:pPr lvl="0"/>
-            <ns1:r>
-              <ns1:rPr/>
-              <ns1:t>Final chatbot now supports both grounded RAG answers and general LLM Q&amp;A.</ns1:t>
-            </ns1:r>
-          </ns1:p>
-          <ns1:p>
-            <ns1:pPr lvl="0"/>
-            <ns1:r>
-              <ns1:rPr/>
-              <ns1:t>Future upgrades:</ns1:t>
-            </ns1:r>
-          </ns1:p>
-          <ns1:p>
-            <ns1:pPr lvl="1"/>
-            <ns1:r>
-              <ns1:rPr/>
-              <ns1:t>Session memory for multi-turn continuity</ns1:t>
-            </ns1:r>
-          </ns1:p>
-          <ns1:p>
-            <ns1:pPr lvl="1"/>
-            <ns1:r>
-              <ns1:rPr/>
-              <ns1:t>Better observability and evaluation metrics</ns1:t>
-            </ns1:r>
-          </ns1:p>
-          <ns1:p>
-            <ns1:pPr lvl="1"/>
-            <ns1:r>
-              <ns1:rPr/>
-              <ns1:t>Expanded multilingual and guardrail support</ns1:t>
-            </ns1:r>
-          </ns1:p>
-        </ns0:txBody>
-      </ns0:sp>
-    </ns0:spTree>
-  </ns0:cSld>
-</ns0:sld>
+<p:sld xmlns:a="http://schemas.openxmlformats.org/drawingml/2006/main" xmlns:r="http://schemas.openxmlformats.org/officeDocument/2006/relationships" xmlns:p="http://schemas.openxmlformats.org/presentationml/2006/main">
+  <p:cSld>
+    <p:spTree>
+      <p:nvGrpSpPr>
+        <p:cNvPr id="1" name=""/>
+        <p:cNvGrpSpPr/>
+        <p:nvPr/>
+      </p:nvGrpSpPr>
+      <p:grpSpPr>
+        <a:xfrm>
+          <a:off x="0" y="0"/>
+          <a:ext cx="0" cy="0"/>
+          <a:chOff x="0" y="0"/>
+          <a:chExt cx="0" cy="0"/>
+        </a:xfrm>
+      </p:grpSpPr>
+      <p:sp>
+        <p:nvSpPr>
+          <p:cNvPr id="2" name="Title 1"/>
+          <p:cNvSpPr>
+            <a:spLocks noGrp="1"/>
+          </p:cNvSpPr>
+          <p:nvPr>
+            <p:ph type="title"/>
+          </p:nvPr>
+        </p:nvSpPr>
+        <p:spPr/>
+        <p:txBody>
+          <a:bodyPr/>
+          <a:lstStyle/>
+          <a:p>
+            <a:pPr marL="0" lvl="0" indent="0">
+              <a:buNone/>
+            </a:pPr>
+            <a:r>
+              <a:t>Conclusion and Next Steps</a:t>
+            </a:r>
+          </a:p>
+        </p:txBody>
+      </p:sp>
+      <p:sp>
+        <p:nvSpPr>
+          <p:cNvPr id="3" name="Content Placeholder 2"/>
+          <p:cNvSpPr>
+            <a:spLocks noGrp="1"/>
+          </p:cNvSpPr>
+          <p:nvPr>
+            <p:ph idx="1"/>
+          </p:nvPr>
+        </p:nvSpPr>
+        <p:spPr/>
+        <p:txBody>
+          <a:bodyPr/>
+          <a:lstStyle/>
+          <a:p>
+            <a:pPr lvl="0"/>
+            <a:r>
+              <a:t>Final chatbot now supports both grounded RAG answers and general LLM Q&amp;A.</a:t>
+            </a:r>
+          </a:p>
+          <a:p>
+            <a:pPr lvl="0"/>
+            <a:r>
+              <a:t>Future upgrades:</a:t>
+            </a:r>
+          </a:p>
+          <a:p>
+            <a:pPr lvl="1"/>
+            <a:r>
+              <a:t>Session memory for multi-turn continuity</a:t>
+            </a:r>
+          </a:p>
+          <a:p>
+            <a:pPr lvl="1"/>
+            <a:r>
+              <a:t>Better observability and evaluation metrics</a:t>
+            </a:r>
+          </a:p>
+          <a:p>
+            <a:pPr lvl="1"/>
+            <a:r>
+              <a:t>Expanded multilingual and guardrail support</a:t>
+            </a:r>
+          </a:p>
+        </p:txBody>
+      </p:sp>
+    </p:spTree>
+  </p:cSld>
+  <p:clrMapOvr>
+    <a:masterClrMapping/>
+  </p:clrMapOvr>
+</p:sld>
 </file>
 
 <file path=ppt/slides/slide2.xml><?xml version="1.0" encoding="utf-8"?>
-<ns0:sld xmlns:ns0="http://schemas.openxmlformats.org/presentationml/2006/main" xmlns:ns1="http://schemas.openxmlformats.org/drawingml/2006/main">
-  <ns0:cSld>
-    <ns0:spTree>
-      <ns0:nvGrpSpPr>
-        <ns0:cNvPr id="1" name=""/>
-        <ns0:cNvGrpSpPr/>
-        <ns0:nvPr/>
-      </ns0:nvGrpSpPr>
-      <ns0:grpSpPr>
-        <ns1:xfrm>
-          <ns1:off x="0" y="0"/>
-          <ns1:ext cx="0" cy="0"/>
-          <ns1:chOff x="0" y="0"/>
-          <ns1:chExt cx="0" cy="0"/>
-        </ns1:xfrm>
-      </ns0:grpSpPr>
-      <ns0:sp>
-        <ns0:nvSpPr>
-          <ns0:cNvPr id="2" name="Title 1"/>
-          <ns0:cNvSpPr>
-            <ns1:spLocks noGrp="1"/>
-          </ns0:cNvSpPr>
-          <ns0:nvPr>
-            <ns0:ph type="title"/>
-          </ns0:nvPr>
-        </ns0:nvSpPr>
-        <ns0:spPr/>
-        <ns0:txBody>
-          <ns1:bodyPr/>
-          <ns1:lstStyle/>
-          <ns1:p>
-            <ns1:pPr lvl="0" indent="0" marL="0">
-              <ns1:buNone/>
-            </ns1:pPr>
-            <ns1:r>
-              <ns1:rPr/>
-              <ns1:t>Problem Addressed</ns1:t>
-            </ns1:r>
-          </ns1:p>
-        </ns0:txBody>
-      </ns0:sp>
-      <ns0:sp>
-        <ns0:nvSpPr>
-          <ns0:cNvPr id="3" name="Content Placeholder 2"/>
-          <ns0:cNvSpPr>
-            <ns1:spLocks noGrp="1"/>
-          </ns0:cNvSpPr>
-          <ns0:nvPr>
-            <ns0:ph idx="1"/>
-          </ns0:nvPr>
-        </ns0:nvSpPr>
-        <ns0:spPr/>
-        <ns0:txBody>
-          <ns1:bodyPr/>
-          <ns1:lstStyle/>
-          <ns1:p>
-            <ns1:pPr lvl="0"/>
-            <ns1:r>
-              <ns1:rPr/>
-              <ns1:t>General-purpose chatbots can sound fluent but still hallucinate.</ns1:t>
-            </ns1:r>
-          </ns1:p>
-          <ns1:p>
-            <ns1:pPr lvl="0"/>
-            <ns1:r>
-              <ns1:rPr/>
-              <ns1:t>Academic/project users need grounded answers with transparent sources.</ns1:t>
-            </ns1:r>
-          </ns1:p>
-          <ns1:p>
-            <ns1:pPr lvl="0"/>
-            <ns1:r>
-              <ns1:rPr/>
-              <ns1:t>The project targets a bilingual assistant: English input, Spanish-first output.</ns1:t>
-            </ns1:r>
-          </ns1:p>
-        </ns0:txBody>
-      </ns0:sp>
-    </ns0:spTree>
-  </ns0:cSld>
-</ns0:sld>
+<p:sld xmlns:a="http://schemas.openxmlformats.org/drawingml/2006/main" xmlns:r="http://schemas.openxmlformats.org/officeDocument/2006/relationships" xmlns:p="http://schemas.openxmlformats.org/presentationml/2006/main">
+  <p:cSld>
+    <p:spTree>
+      <p:nvGrpSpPr>
+        <p:cNvPr id="1" name=""/>
+        <p:cNvGrpSpPr/>
+        <p:nvPr/>
+      </p:nvGrpSpPr>
+      <p:grpSpPr>
+        <a:xfrm>
+          <a:off x="0" y="0"/>
+          <a:ext cx="0" cy="0"/>
+          <a:chOff x="0" y="0"/>
+          <a:chExt cx="0" cy="0"/>
+        </a:xfrm>
+      </p:grpSpPr>
+      <p:sp>
+        <p:nvSpPr>
+          <p:cNvPr id="2" name="Title 1"/>
+          <p:cNvSpPr>
+            <a:spLocks noGrp="1"/>
+          </p:cNvSpPr>
+          <p:nvPr>
+            <p:ph type="title"/>
+          </p:nvPr>
+        </p:nvSpPr>
+        <p:spPr/>
+        <p:txBody>
+          <a:bodyPr/>
+          <a:lstStyle/>
+          <a:p>
+            <a:pPr marL="0" lvl="0" indent="0">
+              <a:buNone/>
+            </a:pPr>
+            <a:r>
+              <a:t>Problem Addressed</a:t>
+            </a:r>
+          </a:p>
+        </p:txBody>
+      </p:sp>
+      <p:sp>
+        <p:nvSpPr>
+          <p:cNvPr id="3" name="Content Placeholder 2"/>
+          <p:cNvSpPr>
+            <a:spLocks noGrp="1"/>
+          </p:cNvSpPr>
+          <p:nvPr>
+            <p:ph idx="1"/>
+          </p:nvPr>
+        </p:nvSpPr>
+        <p:spPr/>
+        <p:txBody>
+          <a:bodyPr/>
+          <a:lstStyle/>
+          <a:p>
+            <a:pPr lvl="0"/>
+            <a:r>
+              <a:t>General-purpose chatbots can sound fluent but still hallucinate.</a:t>
+            </a:r>
+          </a:p>
+          <a:p>
+            <a:pPr lvl="0"/>
+            <a:r>
+              <a:t>Academic/project users need grounded answers with transparent sources.</a:t>
+            </a:r>
+          </a:p>
+          <a:p>
+            <a:pPr lvl="0"/>
+            <a:r>
+              <a:t>The project targets a bilingual assistant: English input, Spanish-first output.</a:t>
+            </a:r>
+          </a:p>
+        </p:txBody>
+      </p:sp>
+    </p:spTree>
+  </p:cSld>
+  <p:clrMapOvr>
+    <a:masterClrMapping/>
+  </p:clrMapOvr>
+</p:sld>
 </file>
 
 <file path=ppt/slides/slide3.xml><?xml version="1.0" encoding="utf-8"?>
-<ns0:sld xmlns:ns0="http://schemas.openxmlformats.org/presentationml/2006/main" xmlns:ns1="http://schemas.openxmlformats.org/drawingml/2006/main">
-  <ns0:cSld>
-    <ns0:spTree>
-      <ns0:nvGrpSpPr>
-        <ns0:cNvPr id="1" name=""/>
-        <ns0:cNvGrpSpPr/>
-        <ns0:nvPr/>
-      </ns0:nvGrpSpPr>
-      <ns0:grpSpPr>
-        <ns1:xfrm>
-          <ns1:off x="0" y="0"/>
-          <ns1:ext cx="0" cy="0"/>
-          <ns1:chOff x="0" y="0"/>
-          <ns1:chExt cx="0" cy="0"/>
-        </ns1:xfrm>
-      </ns0:grpSpPr>
-      <ns0:sp>
-        <ns0:nvSpPr>
-          <ns0:cNvPr id="2" name="Title 1"/>
-          <ns0:cNvSpPr>
-            <ns1:spLocks noGrp="1"/>
-          </ns0:cNvSpPr>
-          <ns0:nvPr>
-            <ns0:ph type="title"/>
-          </ns0:nvPr>
-        </ns0:nvSpPr>
-        <ns0:spPr/>
-        <ns0:txBody>
-          <ns1:bodyPr/>
-          <ns1:lstStyle/>
-          <ns1:p>
-            <ns1:pPr lvl="0" indent="0" marL="0">
-              <ns1:buNone/>
-            </ns1:pPr>
-            <ns1:r>
-              <ns1:rPr/>
-              <ns1:t>Scope and Objectives</ns1:t>
-            </ns1:r>
-          </ns1:p>
-        </ns0:txBody>
-      </ns0:sp>
-      <ns0:sp>
-        <ns0:nvSpPr>
-          <ns0:cNvPr id="3" name="Content Placeholder 2"/>
-          <ns0:cNvSpPr>
-            <ns1:spLocks noGrp="1"/>
-          </ns0:cNvSpPr>
-          <ns0:nvPr>
-            <ns0:ph idx="1"/>
-          </ns0:nvPr>
-        </ns0:nvSpPr>
-        <ns0:spPr/>
-        <ns0:txBody>
-          <ns1:bodyPr/>
-          <ns1:lstStyle/>
-          <ns1:p>
-            <ns1:pPr lvl="0"/>
-            <ns1:r>
-              <ns1:rPr/>
-              <ns1:t>Build a working chatbot with web UI + API backend.</ns1:t>
-            </ns1:r>
-          </ns1:p>
-          <ns1:p>
-            <ns1:pPr lvl="0"/>
-            <ns1:r>
-              <ns1:rPr/>
-              <ns1:t>Route intelligently between grounded retrieval and general LLM response.</ns1:t>
-            </ns1:r>
-          </ns1:p>
-          <ns1:p>
-            <ns1:pPr lvl="0"/>
-            <ns1:r>
-              <ns1:rPr/>
-              <ns1:t>Provide Spanish output with optional English for transparency.</ns1:t>
-            </ns1:r>
-          </ns1:p>
-          <ns1:p>
-            <ns1:pPr lvl="0"/>
-            <ns1:r>
-              <ns1:rPr/>
-              <ns1:t>Support fallback responses when confidence is low.</ns1:t>
-            </ns1:r>
-          </ns1:p>
-          <ns1:p>
-            <ns1:pPr lvl="0"/>
-            <ns1:r>
-              <ns1:rPr/>
-              <ns1:t>Keep architecture modular for future extension.</ns1:t>
-            </ns1:r>
-          </ns1:p>
-        </ns0:txBody>
-      </ns0:sp>
-    </ns0:spTree>
-  </ns0:cSld>
-</ns0:sld>
+<p:sld xmlns:a="http://schemas.openxmlformats.org/drawingml/2006/main" xmlns:r="http://schemas.openxmlformats.org/officeDocument/2006/relationships" xmlns:p="http://schemas.openxmlformats.org/presentationml/2006/main">
+  <p:cSld>
+    <p:spTree>
+      <p:nvGrpSpPr>
+        <p:cNvPr id="1" name=""/>
+        <p:cNvGrpSpPr/>
+        <p:nvPr/>
+      </p:nvGrpSpPr>
+      <p:grpSpPr>
+        <a:xfrm>
+          <a:off x="0" y="0"/>
+          <a:ext cx="0" cy="0"/>
+          <a:chOff x="0" y="0"/>
+          <a:chExt cx="0" cy="0"/>
+        </a:xfrm>
+      </p:grpSpPr>
+      <p:sp>
+        <p:nvSpPr>
+          <p:cNvPr id="2" name="Title 1"/>
+          <p:cNvSpPr>
+            <a:spLocks noGrp="1"/>
+          </p:cNvSpPr>
+          <p:nvPr>
+            <p:ph type="title"/>
+          </p:nvPr>
+        </p:nvSpPr>
+        <p:spPr/>
+        <p:txBody>
+          <a:bodyPr/>
+          <a:lstStyle/>
+          <a:p>
+            <a:pPr marL="0" lvl="0" indent="0">
+              <a:buNone/>
+            </a:pPr>
+            <a:r>
+              <a:t>Scope and Objectives</a:t>
+            </a:r>
+          </a:p>
+        </p:txBody>
+      </p:sp>
+      <p:sp>
+        <p:nvSpPr>
+          <p:cNvPr id="3" name="Content Placeholder 2"/>
+          <p:cNvSpPr>
+            <a:spLocks noGrp="1"/>
+          </p:cNvSpPr>
+          <p:nvPr>
+            <p:ph idx="1"/>
+          </p:nvPr>
+        </p:nvSpPr>
+        <p:spPr/>
+        <p:txBody>
+          <a:bodyPr/>
+          <a:lstStyle/>
+          <a:p>
+            <a:pPr lvl="0"/>
+            <a:r>
+              <a:t>Build a working chatbot with web UI + API backend.</a:t>
+            </a:r>
+          </a:p>
+          <a:p>
+            <a:pPr lvl="0"/>
+            <a:r>
+              <a:t>Route intelligently between grounded retrieval and general LLM response.</a:t>
+            </a:r>
+          </a:p>
+          <a:p>
+            <a:pPr lvl="0"/>
+            <a:r>
+              <a:t>Provide Spanish output with optional English for transparency.</a:t>
+            </a:r>
+          </a:p>
+          <a:p>
+            <a:pPr lvl="0"/>
+            <a:r>
+              <a:t>Support fallback responses when confidence is low.</a:t>
+            </a:r>
+          </a:p>
+          <a:p>
+            <a:pPr lvl="0"/>
+            <a:r>
+              <a:t>Keep architecture modular for future extension.</a:t>
+            </a:r>
+          </a:p>
+        </p:txBody>
+      </p:sp>
+    </p:spTree>
+  </p:cSld>
+  <p:clrMapOvr>
+    <a:masterClrMapping/>
+  </p:clrMapOvr>
+</p:sld>
 </file>
 
 <file path=ppt/slides/slide4.xml><?xml version="1.0" encoding="utf-8"?>
-<ns0:sld xmlns:ns0="http://schemas.openxmlformats.org/presentationml/2006/main" xmlns:ns1="http://schemas.openxmlformats.org/drawingml/2006/main" xmlns:ns2="http://schemas.openxmlformats.org/officeDocument/2006/relationships">
-  <ns0:cSld>
-    <ns0:spTree>
-      <ns0:nvGrpSpPr>
-        <ns0:cNvPr id="1" name=""/>
-        <ns0:cNvGrpSpPr/>
-        <ns0:nvPr/>
-      </ns0:nvGrpSpPr>
-      <ns0:grpSpPr>
-        <ns1:xfrm>
-          <ns1:off x="0" y="0"/>
-          <ns1:ext cx="0" cy="0"/>
-          <ns1:chOff x="0" y="0"/>
-          <ns1:chExt cx="0" cy="0"/>
-        </ns1:xfrm>
-      </ns0:grpSpPr>
-      <ns0:sp>
-        <ns0:nvSpPr>
-          <ns0:cNvPr id="2" name="Title 1"/>
-          <ns0:cNvSpPr>
-            <ns1:spLocks noGrp="1"/>
-          </ns0:cNvSpPr>
-          <ns0:nvPr>
-            <ns0:ph type="title"/>
-          </ns0:nvPr>
-        </ns0:nvSpPr>
-        <ns0:spPr>
-          <ns1:xfrm>
-            <ns1:off x="457201" y="204787"/>
-            <ns1:ext cx="3008313" cy="871538"/>
-          </ns1:xfrm>
-        </ns0:spPr>
-        <ns0:txBody>
-          <ns1:bodyPr/>
-          <ns1:lstStyle/>
-          <ns1:p>
-            <ns1:pPr lvl="0" indent="0" marL="0">
-              <ns1:buNone/>
-            </ns1:pPr>
-            <ns1:r>
-              <ns1:rPr/>
-              <ns1:t>System Design</ns1:t>
-            </ns1:r>
-          </ns1:p>
-        </ns0:txBody>
-      </ns0:sp>
-      <ns0:sp>
-        <ns0:nvSpPr>
-          <ns0:cNvPr id="4" name="Text Placeholder 3"/>
-          <ns0:cNvSpPr>
-            <ns1:spLocks noGrp="1"/>
-          </ns0:cNvSpPr>
-          <ns0:nvPr>
-            <ns0:ph idx="2" sz="half" type="body"/>
-          </ns0:nvPr>
-        </ns0:nvSpPr>
-        <ns0:spPr/>
-        <ns0:txBody>
-          <ns1:bodyPr/>
-          <ns1:lstStyle/>
-          <ns1:p>
-            <ns1:pPr lvl="0"/>
-            <ns1:r>
-              <ns1:rPr/>
-              <ns1:t>Frontend: React chat interface (message thread + loading state).</ns1:t>
-            </ns1:r>
-          </ns1:p>
-          <ns1:p>
-            <ns1:pPr lvl="0"/>
-            <ns1:r>
-              <ns1:rPr/>
-              <ns1:t>Backend: FastAPI with MVC-style layers (controllers/services/repositories/models).</ns1:t>
-            </ns1:r>
-          </ns1:p>
-          <ns1:p>
-            <ns1:pPr lvl="0"/>
-            <ns1:r>
-              <ns1:rPr/>
-              <ns1:t>Retrieval: SentenceTransformer (preferred) with TF-IDF fallback.</ns1:t>
-            </ns1:r>
-          </ns1:p>
-          <ns1:p>
-            <ns1:pPr lvl="0"/>
-            <ns1:r>
-              <ns1:rPr/>
-              <ns1:t>Generation: Azure OpenAI for RAG completion, general QA, and translation when configured.</ns1:t>
-            </ns1:r>
-          </ns1:p>
-        </ns0:txBody>
-      </ns0:sp>
-      <ns0:pic>
-        <ns0:nvPicPr>
-          <ns0:cNvPr descr="assets/screenshot_architecture.png" id="0" name="Picture 1"/>
-          <ns0:cNvPicPr>
-            <ns1:picLocks noGrp="1" noChangeAspect="1"/>
-          </ns0:cNvPicPr>
-          <ns0:nvPr/>
-        </ns0:nvPicPr>
-        <ns0:blipFill>
-          <ns1:blip ns2:embed="rId2"/>
-          <ns1:stretch>
-            <ns1:fillRect/>
-          </ns1:stretch>
-        </ns0:blipFill>
-        <ns0:spPr bwMode="auto">
-          <ns1:xfrm>
-            <ns1:off x="3568700" y="698500"/>
-            <ns1:ext cx="5105400" cy="2870200"/>
-          </ns1:xfrm>
-          <ns1:prstGeom prst="rect">
-            <ns1:avLst/>
-          </ns1:prstGeom>
-          <ns1:noFill/>
-          <ns1:ln w="9525">
-            <ns1:noFill/>
-            <ns1:headEnd/>
-            <ns1:tailEnd/>
-          </ns1:ln>
-        </ns0:spPr>
-      </ns0:pic>
-      <ns0:sp>
-        <ns0:nvSpPr>
-          <ns0:cNvPr id="1" name="TextBox 3"/>
-          <ns0:cNvSpPr txBox="1"/>
-          <ns0:nvPr/>
-        </ns0:nvSpPr>
-        <ns0:spPr>
-          <ns1:xfrm>
-            <ns1:off x="3568700" y="4076700"/>
-            <ns1:ext cx="5105400" cy="508000"/>
-          </ns1:xfrm>
-          <ns1:prstGeom prst="rect">
-            <ns1:avLst/>
-          </ns1:prstGeom>
-          <ns1:noFill/>
-        </ns0:spPr>
-        <ns0:txBody>
-          <ns1:bodyPr/>
-          <ns1:lstStyle/>
-          <ns1:p>
-            <ns1:pPr lvl="0" indent="0" marL="0" algn="ctr">
-              <ns1:buNone/>
-            </ns1:pPr>
-            <ns1:r>
-              <ns1:rPr/>
-              <ns1:t>Architecture</ns1:t>
-            </ns1:r>
-          </ns1:p>
-        </ns0:txBody>
-      </ns0:sp>
-    </ns0:spTree>
-  </ns0:cSld>
-</ns0:sld>
+<p:sld xmlns:a="http://schemas.openxmlformats.org/drawingml/2006/main" xmlns:r="http://schemas.openxmlformats.org/officeDocument/2006/relationships" xmlns:p="http://schemas.openxmlformats.org/presentationml/2006/main">
+  <p:cSld>
+    <p:spTree>
+      <p:nvGrpSpPr>
+        <p:cNvPr id="1" name=""/>
+        <p:cNvGrpSpPr/>
+        <p:nvPr/>
+      </p:nvGrpSpPr>
+      <p:grpSpPr>
+        <a:xfrm>
+          <a:off x="0" y="0"/>
+          <a:ext cx="0" cy="0"/>
+          <a:chOff x="0" y="0"/>
+          <a:chExt cx="0" cy="0"/>
+        </a:xfrm>
+      </p:grpSpPr>
+      <p:sp>
+        <p:nvSpPr>
+          <p:cNvPr id="2" name="Title 1"/>
+          <p:cNvSpPr>
+            <a:spLocks noGrp="1"/>
+          </p:cNvSpPr>
+          <p:nvPr>
+            <p:ph type="title"/>
+          </p:nvPr>
+        </p:nvSpPr>
+        <p:spPr>
+          <a:xfrm>
+            <a:off x="457201" y="204787"/>
+            <a:ext cx="3008313" cy="871538"/>
+          </a:xfrm>
+        </p:spPr>
+        <p:txBody>
+          <a:bodyPr/>
+          <a:lstStyle/>
+          <a:p>
+            <a:pPr marL="0" lvl="0" indent="0">
+              <a:buNone/>
+            </a:pPr>
+            <a:r>
+              <a:t>System Design</a:t>
+            </a:r>
+          </a:p>
+        </p:txBody>
+      </p:sp>
+      <p:sp>
+        <p:nvSpPr>
+          <p:cNvPr id="4" name="Text Placeholder 3"/>
+          <p:cNvSpPr>
+            <a:spLocks noGrp="1"/>
+          </p:cNvSpPr>
+          <p:nvPr>
+            <p:ph type="body" sz="half" idx="2"/>
+          </p:nvPr>
+        </p:nvSpPr>
+        <p:spPr/>
+        <p:txBody>
+          <a:bodyPr/>
+          <a:lstStyle/>
+          <a:p>
+            <a:pPr lvl="0"/>
+            <a:r>
+              <a:t>Frontend: React chat interface (message thread + loading state).</a:t>
+            </a:r>
+          </a:p>
+          <a:p>
+            <a:pPr lvl="0"/>
+            <a:r>
+              <a:t>Backend: FastAPI with MVC-style layers (controllers/services/repositories/models).</a:t>
+            </a:r>
+          </a:p>
+          <a:p>
+            <a:pPr lvl="0"/>
+            <a:r>
+              <a:t>Retrieval: SentenceTransformer (preferred) with TF-IDF fallback.</a:t>
+            </a:r>
+          </a:p>
+          <a:p>
+            <a:pPr lvl="0"/>
+            <a:r>
+              <a:t>Generation: Azure OpenAI for RAG completion, general QA, and translation when configured.</a:t>
+            </a:r>
+          </a:p>
+        </p:txBody>
+      </p:sp>
+      <p:sp>
+        <p:nvSpPr>
+          <p:cNvPr id="5" name="TextBox 3"/>
+          <p:cNvSpPr txBox="1"/>
+          <p:nvPr/>
+        </p:nvSpPr>
+        <p:spPr>
+          <a:xfrm>
+            <a:off x="3568700" y="4076700"/>
+            <a:ext cx="5105400" cy="508000"/>
+          </a:xfrm>
+          <a:prstGeom prst="rect">
+            <a:avLst/>
+          </a:prstGeom>
+          <a:noFill/>
+        </p:spPr>
+        <p:txBody>
+          <a:bodyPr/>
+          <a:lstStyle/>
+          <a:p>
+            <a:pPr marL="0" lvl="0" indent="0" algn="ctr">
+              <a:buNone/>
+            </a:pPr>
+            <a:r>
+              <a:t>Architecture</a:t>
+            </a:r>
+          </a:p>
+        </p:txBody>
+      </p:sp>
+      <p:pic>
+        <p:nvPicPr>
+          <p:cNvPr id="6" name="Picture 5">
+            <a:extLst>
+              <a:ext uri="{FF2B5EF4-FFF2-40B4-BE49-F238E27FC236}">
+                <a16:creationId xmlns:a16="http://schemas.microsoft.com/office/drawing/2014/main" id="{66ACDDA0-5072-EC40-2BDC-B93AB0CCBA55}"/>
+              </a:ext>
+            </a:extLst>
+          </p:cNvPr>
+          <p:cNvPicPr>
+            <a:picLocks noChangeAspect="1"/>
+          </p:cNvPicPr>
+          <p:nvPr/>
+        </p:nvPicPr>
+        <p:blipFill>
+          <a:blip r:embed="rId2"/>
+          <a:stretch>
+            <a:fillRect/>
+          </a:stretch>
+        </p:blipFill>
+        <p:spPr>
+          <a:xfrm>
+            <a:off x="3902653" y="640556"/>
+            <a:ext cx="4287189" cy="3469847"/>
+          </a:xfrm>
+          <a:prstGeom prst="rect">
+            <a:avLst/>
+          </a:prstGeom>
+        </p:spPr>
+      </p:pic>
+    </p:spTree>
+  </p:cSld>
+  <p:clrMapOvr>
+    <a:masterClrMapping/>
+  </p:clrMapOvr>
+</p:sld>
 </file>
 
 <file path=ppt/slides/slide5.xml><?xml version="1.0" encoding="utf-8"?>
-<ns0:sld xmlns:ns0="http://schemas.openxmlformats.org/presentationml/2006/main" xmlns:ns1="http://schemas.openxmlformats.org/drawingml/2006/main" xmlns:ns2="http://schemas.openxmlformats.org/officeDocument/2006/relationships">
-  <ns0:cSld>
-    <ns0:spTree>
-      <ns0:nvGrpSpPr>
-        <ns0:cNvPr id="1" name=""/>
-        <ns0:cNvGrpSpPr/>
-        <ns0:nvPr/>
-      </ns0:nvGrpSpPr>
-      <ns0:grpSpPr>
-        <ns1:xfrm>
-          <ns1:off x="0" y="0"/>
-          <ns1:ext cx="0" cy="0"/>
-          <ns1:chOff x="0" y="0"/>
-          <ns1:chExt cx="0" cy="0"/>
-        </ns1:xfrm>
-      </ns0:grpSpPr>
-      <ns0:sp>
-        <ns0:nvSpPr>
-          <ns0:cNvPr id="2" name="Title 1"/>
-          <ns0:cNvSpPr>
-            <ns1:spLocks noGrp="1"/>
-          </ns0:cNvSpPr>
-          <ns0:nvPr>
-            <ns0:ph type="title"/>
-          </ns0:nvPr>
-        </ns0:nvSpPr>
-        <ns0:spPr>
-          <ns1:xfrm>
-            <ns1:off x="457201" y="204787"/>
-            <ns1:ext cx="3008313" cy="871538"/>
-          </ns1:xfrm>
-        </ns0:spPr>
-        <ns0:txBody>
-          <ns1:bodyPr/>
-          <ns1:lstStyle/>
-          <ns1:p>
-            <ns1:pPr lvl="0" indent="0" marL="0">
-              <ns1:buNone/>
-            </ns1:pPr>
-            <ns1:r>
-              <ns1:rPr/>
-              <ns1:t>App Screenshot: Chat Experience</ns1:t>
-            </ns1:r>
-          </ns1:p>
-        </ns0:txBody>
-      </ns0:sp>
-      <ns0:sp>
-        <ns0:nvSpPr>
-          <ns0:cNvPr id="4" name="Text Placeholder 3"/>
-          <ns0:cNvSpPr>
-            <ns1:spLocks noGrp="1"/>
-          </ns0:cNvSpPr>
-          <ns0:nvPr>
-            <ns0:ph idx="2" sz="half" type="body"/>
-          </ns0:nvPr>
-        </ns0:nvSpPr>
-        <ns0:spPr/>
-        <ns0:txBody>
-          <ns1:bodyPr/>
-          <ns1:lstStyle/>
-          <ns1:p>
-            <ns1:pPr lvl="0"/>
-            <ns1:r>
-              <ns1:rPr/>
-              <ns1:t>Sequential conversation flow in a messaging layout.</ns1:t>
-            </ns1:r>
-          </ns1:p>
-          <ns1:p>
-            <ns1:pPr lvl="0"/>
-            <ns1:r>
-              <ns1:rPr/>
-              <ns1:t>User prompt + assistant bilingual response.</ns1:t>
-            </ns1:r>
-          </ns1:p>
-          <ns1:p>
-            <ns1:pPr lvl="0"/>
-            <ns1:r>
-              <ns1:rPr/>
-              <ns1:t>Include-English toggle for response transparency.</ns1:t>
-            </ns1:r>
-          </ns1:p>
-        </ns0:txBody>
-      </ns0:sp>
-      <ns0:pic>
-        <ns0:nvPicPr>
-          <ns0:cNvPr descr="assets/screenshot_chat_ui.png" id="0" name="Picture 1"/>
-          <ns0:cNvPicPr>
-            <ns1:picLocks noGrp="1" noChangeAspect="1"/>
-          </ns0:cNvPicPr>
-          <ns0:nvPr/>
-        </ns0:nvPicPr>
-        <ns0:blipFill>
-          <ns1:blip ns2:embed="rId2"/>
-          <ns1:stretch>
-            <ns1:fillRect/>
-          </ns1:stretch>
-        </ns0:blipFill>
-        <ns0:spPr bwMode="auto">
-          <ns1:xfrm>
-            <ns1:off x="3568700" y="698500"/>
-            <ns1:ext cx="5105400" cy="2870200"/>
-          </ns1:xfrm>
-          <ns1:prstGeom prst="rect">
-            <ns1:avLst/>
-          </ns1:prstGeom>
-          <ns1:noFill/>
-          <ns1:ln w="9525">
-            <ns1:noFill/>
-            <ns1:headEnd/>
-            <ns1:tailEnd/>
-          </ns1:ln>
-        </ns0:spPr>
-      </ns0:pic>
-      <ns0:sp>
-        <ns0:nvSpPr>
-          <ns0:cNvPr id="1" name="TextBox 3"/>
-          <ns0:cNvSpPr txBox="1"/>
-          <ns0:nvPr/>
-        </ns0:nvSpPr>
-        <ns0:spPr>
-          <ns1:xfrm>
-            <ns1:off x="3568700" y="4076700"/>
-            <ns1:ext cx="5105400" cy="508000"/>
-          </ns1:xfrm>
-          <ns1:prstGeom prst="rect">
-            <ns1:avLst/>
-          </ns1:prstGeom>
-          <ns1:noFill/>
-        </ns0:spPr>
-        <ns0:txBody>
-          <ns1:bodyPr/>
-          <ns1:lstStyle/>
-          <ns1:p>
-            <ns1:pPr lvl="0" indent="0" marL="0" algn="ctr">
-              <ns1:buNone/>
-            </ns1:pPr>
-            <ns1:r>
-              <ns1:rPr/>
-              <ns1:t>Chat UI</ns1:t>
-            </ns1:r>
-          </ns1:p>
-        </ns0:txBody>
-      </ns0:sp>
-    </ns0:spTree>
-  </ns0:cSld>
-</ns0:sld>
+<p:sld xmlns:a="http://schemas.openxmlformats.org/drawingml/2006/main" xmlns:r="http://schemas.openxmlformats.org/officeDocument/2006/relationships" xmlns:p="http://schemas.openxmlformats.org/presentationml/2006/main">
+  <p:cSld>
+    <p:spTree>
+      <p:nvGrpSpPr>
+        <p:cNvPr id="1" name=""/>
+        <p:cNvGrpSpPr/>
+        <p:nvPr/>
+      </p:nvGrpSpPr>
+      <p:grpSpPr>
+        <a:xfrm>
+          <a:off x="0" y="0"/>
+          <a:ext cx="0" cy="0"/>
+          <a:chOff x="0" y="0"/>
+          <a:chExt cx="0" cy="0"/>
+        </a:xfrm>
+      </p:grpSpPr>
+      <p:sp>
+        <p:nvSpPr>
+          <p:cNvPr id="2" name="Title 1"/>
+          <p:cNvSpPr>
+            <a:spLocks noGrp="1"/>
+          </p:cNvSpPr>
+          <p:nvPr>
+            <p:ph type="title"/>
+          </p:nvPr>
+        </p:nvSpPr>
+        <p:spPr>
+          <a:xfrm>
+            <a:off x="457201" y="204787"/>
+            <a:ext cx="3008313" cy="871538"/>
+          </a:xfrm>
+        </p:spPr>
+        <p:txBody>
+          <a:bodyPr/>
+          <a:lstStyle/>
+          <a:p>
+            <a:pPr marL="0" lvl="0" indent="0">
+              <a:buNone/>
+            </a:pPr>
+            <a:r>
+              <a:t>App Screenshot: Chat Experience</a:t>
+            </a:r>
+          </a:p>
+        </p:txBody>
+      </p:sp>
+      <p:sp>
+        <p:nvSpPr>
+          <p:cNvPr id="4" name="Text Placeholder 3"/>
+          <p:cNvSpPr>
+            <a:spLocks noGrp="1"/>
+          </p:cNvSpPr>
+          <p:nvPr>
+            <p:ph type="body" sz="half" idx="2"/>
+          </p:nvPr>
+        </p:nvSpPr>
+        <p:spPr/>
+        <p:txBody>
+          <a:bodyPr/>
+          <a:lstStyle/>
+          <a:p>
+            <a:pPr lvl="0"/>
+            <a:r>
+              <a:t>Sequential conversation flow in a messaging layout.</a:t>
+            </a:r>
+          </a:p>
+          <a:p>
+            <a:pPr lvl="0"/>
+            <a:r>
+              <a:t>User prompt + assistant bilingual response.</a:t>
+            </a:r>
+          </a:p>
+          <a:p>
+            <a:pPr lvl="0"/>
+            <a:r>
+              <a:t>Include-English toggle for response transparency.</a:t>
+            </a:r>
+          </a:p>
+        </p:txBody>
+      </p:sp>
+      <p:sp>
+        <p:nvSpPr>
+          <p:cNvPr id="5" name="TextBox 3"/>
+          <p:cNvSpPr txBox="1"/>
+          <p:nvPr/>
+        </p:nvSpPr>
+        <p:spPr>
+          <a:xfrm>
+            <a:off x="3568700" y="4076700"/>
+            <a:ext cx="5105400" cy="508000"/>
+          </a:xfrm>
+          <a:prstGeom prst="rect">
+            <a:avLst/>
+          </a:prstGeom>
+          <a:noFill/>
+        </p:spPr>
+        <p:txBody>
+          <a:bodyPr/>
+          <a:lstStyle/>
+          <a:p>
+            <a:pPr marL="0" lvl="0" indent="0" algn="ctr">
+              <a:buNone/>
+            </a:pPr>
+            <a:r>
+              <a:t>Chat UI</a:t>
+            </a:r>
+          </a:p>
+        </p:txBody>
+      </p:sp>
+      <p:pic>
+        <p:nvPicPr>
+          <p:cNvPr id="7" name="Picture 6" descr="A screenshot of a chatbot&#10;&#10;AI-generated content may be incorrect.">
+            <a:extLst>
+              <a:ext uri="{FF2B5EF4-FFF2-40B4-BE49-F238E27FC236}">
+                <a16:creationId xmlns:a16="http://schemas.microsoft.com/office/drawing/2014/main" id="{C578AE87-ABC9-771E-99FA-902C29C225D6}"/>
+              </a:ext>
+            </a:extLst>
+          </p:cNvPr>
+          <p:cNvPicPr>
+            <a:picLocks noChangeAspect="1"/>
+          </p:cNvPicPr>
+          <p:nvPr/>
+        </p:nvPicPr>
+        <p:blipFill>
+          <a:blip r:embed="rId2"/>
+          <a:stretch>
+            <a:fillRect/>
+          </a:stretch>
+        </p:blipFill>
+        <p:spPr>
+          <a:xfrm>
+            <a:off x="4576483" y="421419"/>
+            <a:ext cx="3089833" cy="3372512"/>
+          </a:xfrm>
+          <a:prstGeom prst="rect">
+            <a:avLst/>
+          </a:prstGeom>
+        </p:spPr>
+      </p:pic>
+    </p:spTree>
+  </p:cSld>
+  <p:clrMapOvr>
+    <a:masterClrMapping/>
+  </p:clrMapOvr>
+</p:sld>
 </file>
 
 <file path=ppt/slides/slide6.xml><?xml version="1.0" encoding="utf-8"?>
-<ns0:sld xmlns:ns0="http://schemas.openxmlformats.org/presentationml/2006/main" xmlns:ns1="http://schemas.openxmlformats.org/drawingml/2006/main" xmlns:ns2="http://schemas.openxmlformats.org/officeDocument/2006/relationships">
-  <ns0:cSld>
-    <ns0:spTree>
-      <ns0:nvGrpSpPr>
-        <ns0:cNvPr id="1" name=""/>
-        <ns0:cNvGrpSpPr/>
-        <ns0:nvPr/>
-      </ns0:nvGrpSpPr>
-      <ns0:grpSpPr>
-        <ns1:xfrm>
-          <ns1:off x="0" y="0"/>
-          <ns1:ext cx="0" cy="0"/>
-          <ns1:chOff x="0" y="0"/>
-          <ns1:chExt cx="0" cy="0"/>
-        </ns1:xfrm>
-      </ns0:grpSpPr>
-      <ns0:sp>
-        <ns0:nvSpPr>
-          <ns0:cNvPr id="2" name="Title 1"/>
-          <ns0:cNvSpPr>
-            <ns1:spLocks noGrp="1"/>
-          </ns0:cNvSpPr>
-          <ns0:nvPr>
-            <ns0:ph type="title"/>
-          </ns0:nvPr>
-        </ns0:nvSpPr>
-        <ns0:spPr>
-          <ns1:xfrm>
-            <ns1:off x="457201" y="204787"/>
-            <ns1:ext cx="3008313" cy="871538"/>
-          </ns1:xfrm>
-        </ns0:spPr>
-        <ns0:txBody>
-          <ns1:bodyPr/>
-          <ns1:lstStyle/>
-          <ns1:p>
-            <ns1:pPr lvl="0" indent="0" marL="0">
-              <ns1:buNone/>
-            </ns1:pPr>
-            <ns1:r>
-              <ns1:rPr/>
-              <ns1:t>App Screenshot: Response Payload</ns1:t>
-            </ns1:r>
-          </ns1:p>
-        </ns0:txBody>
-      </ns0:sp>
-      <ns0:sp>
-        <ns0:nvSpPr>
-          <ns0:cNvPr id="4" name="Text Placeholder 3"/>
-          <ns0:cNvSpPr>
-            <ns1:spLocks noGrp="1"/>
-          </ns0:cNvSpPr>
-          <ns0:nvPr>
-            <ns0:ph idx="2" sz="half" type="body"/>
-          </ns0:nvPr>
-        </ns0:nvSpPr>
-        <ns0:spPr/>
-        <ns0:txBody>
-          <ns1:bodyPr/>
-          <ns1:lstStyle/>
-          <ns1:p>
-            <ns1:pPr lvl="0"/>
-            <ns1:r>
-              <ns1:rPr/>
-              <ns1:t>API route: </ns1:t>
-            </ns1:r>
-            <ns1:r>
-              <ns1:rPr>
-                <ns1:latin typeface="Courier"/>
-              </ns1:rPr>
-              <ns1:t>POST /api/translate</ns1:t>
-            </ns1:r>
-          </ns1:p>
-          <ns1:p>
-            <ns1:pPr lvl="0"/>
-            <ns1:r>
-              <ns1:rPr/>
-              <ns1:t>Request: </ns1:t>
-            </ns1:r>
-            <ns1:r>
-              <ns1:rPr>
-                <ns1:latin typeface="Courier"/>
-              </ns1:rPr>
-              <ns1:t>{ text, include_english }</ns1:t>
-            </ns1:r>
-          </ns1:p>
-          <ns1:p>
-            <ns1:pPr lvl="0"/>
-            <ns1:r>
-              <ns1:rPr/>
-              <ns1:t>Response: </ns1:t>
-            </ns1:r>
-            <ns1:r>
-              <ns1:rPr>
-                <ns1:latin typeface="Courier"/>
-              </ns1:rPr>
-              <ns1:t>{ spanish, english }</ns1:t>
-            </ns1:r>
-            <ns1:r>
-              <ns1:rPr/>
-              <ns1:t> (english optional)</ns1:t>
-            </ns1:r>
-          </ns1:p>
-        </ns0:txBody>
-      </ns0:sp>
-      <ns0:pic>
-        <ns0:nvPicPr>
-          <ns0:cNvPr descr="assets/screenshot_api_response.png" id="0" name="Picture 1"/>
-          <ns0:cNvPicPr>
-            <ns1:picLocks noGrp="1" noChangeAspect="1"/>
-          </ns0:cNvPicPr>
-          <ns0:nvPr/>
-        </ns0:nvPicPr>
-        <ns0:blipFill>
-          <ns1:blip ns2:embed="rId2"/>
-          <ns1:stretch>
-            <ns1:fillRect/>
-          </ns1:stretch>
-        </ns0:blipFill>
-        <ns0:spPr bwMode="auto">
-          <ns1:xfrm>
-            <ns1:off x="3568700" y="698500"/>
-            <ns1:ext cx="5105400" cy="2870200"/>
-          </ns1:xfrm>
-          <ns1:prstGeom prst="rect">
-            <ns1:avLst/>
-          </ns1:prstGeom>
-          <ns1:noFill/>
-          <ns1:ln w="9525">
-            <ns1:noFill/>
-            <ns1:headEnd/>
-            <ns1:tailEnd/>
-          </ns1:ln>
-        </ns0:spPr>
-      </ns0:pic>
-      <ns0:sp>
-        <ns0:nvSpPr>
-          <ns0:cNvPr id="1" name="TextBox 3"/>
-          <ns0:cNvSpPr txBox="1"/>
-          <ns0:nvPr/>
-        </ns0:nvSpPr>
-        <ns0:spPr>
-          <ns1:xfrm>
-            <ns1:off x="3568700" y="4076700"/>
-            <ns1:ext cx="5105400" cy="508000"/>
-          </ns1:xfrm>
-          <ns1:prstGeom prst="rect">
-            <ns1:avLst/>
-          </ns1:prstGeom>
-          <ns1:noFill/>
-        </ns0:spPr>
-        <ns0:txBody>
-          <ns1:bodyPr/>
-          <ns1:lstStyle/>
-          <ns1:p>
-            <ns1:pPr lvl="0" indent="0" marL="0" algn="ctr">
-              <ns1:buNone/>
-            </ns1:pPr>
-            <ns1:r>
-              <ns1:rPr/>
-              <ns1:t>API Response</ns1:t>
-            </ns1:r>
-          </ns1:p>
-        </ns0:txBody>
-      </ns0:sp>
-    </ns0:spTree>
-  </ns0:cSld>
-</ns0:sld>
+<p:sld xmlns:a="http://schemas.openxmlformats.org/drawingml/2006/main" xmlns:r="http://schemas.openxmlformats.org/officeDocument/2006/relationships" xmlns:p="http://schemas.openxmlformats.org/presentationml/2006/main">
+  <p:cSld>
+    <p:spTree>
+      <p:nvGrpSpPr>
+        <p:cNvPr id="1" name=""/>
+        <p:cNvGrpSpPr/>
+        <p:nvPr/>
+      </p:nvGrpSpPr>
+      <p:grpSpPr>
+        <a:xfrm>
+          <a:off x="0" y="0"/>
+          <a:ext cx="0" cy="0"/>
+          <a:chOff x="0" y="0"/>
+          <a:chExt cx="0" cy="0"/>
+        </a:xfrm>
+      </p:grpSpPr>
+      <p:sp>
+        <p:nvSpPr>
+          <p:cNvPr id="2" name="Title 1"/>
+          <p:cNvSpPr>
+            <a:spLocks noGrp="1"/>
+          </p:cNvSpPr>
+          <p:nvPr>
+            <p:ph type="title"/>
+          </p:nvPr>
+        </p:nvSpPr>
+        <p:spPr>
+          <a:xfrm>
+            <a:off x="457201" y="204787"/>
+            <a:ext cx="3008313" cy="871538"/>
+          </a:xfrm>
+        </p:spPr>
+        <p:txBody>
+          <a:bodyPr/>
+          <a:lstStyle/>
+          <a:p>
+            <a:pPr marL="0" lvl="0" indent="0">
+              <a:buNone/>
+            </a:pPr>
+            <a:r>
+              <a:t>App Screenshot: Response Payload</a:t>
+            </a:r>
+          </a:p>
+        </p:txBody>
+      </p:sp>
+      <p:sp>
+        <p:nvSpPr>
+          <p:cNvPr id="4" name="Text Placeholder 3"/>
+          <p:cNvSpPr>
+            <a:spLocks noGrp="1"/>
+          </p:cNvSpPr>
+          <p:nvPr>
+            <p:ph type="body" sz="half" idx="2"/>
+          </p:nvPr>
+        </p:nvSpPr>
+        <p:spPr/>
+        <p:txBody>
+          <a:bodyPr/>
+          <a:lstStyle/>
+          <a:p>
+            <a:pPr lvl="0"/>
+            <a:r>
+              <a:t>API route: </a:t>
+            </a:r>
+            <a:r>
+              <a:rPr>
+                <a:latin typeface="Courier"/>
+              </a:rPr>
+              <a:t>POST /api/translate</a:t>
+            </a:r>
+          </a:p>
+          <a:p>
+            <a:pPr lvl="0"/>
+            <a:r>
+              <a:t>Request: </a:t>
+            </a:r>
+            <a:r>
+              <a:rPr>
+                <a:latin typeface="Courier"/>
+              </a:rPr>
+              <a:t>{ text, include_english }</a:t>
+            </a:r>
+          </a:p>
+          <a:p>
+            <a:pPr lvl="0"/>
+            <a:r>
+              <a:t>Response: </a:t>
+            </a:r>
+            <a:r>
+              <a:rPr>
+                <a:latin typeface="Courier"/>
+              </a:rPr>
+              <a:t>{ spanish, english }</a:t>
+            </a:r>
+            <a:r>
+              <a:t> (english optional)</a:t>
+            </a:r>
+          </a:p>
+        </p:txBody>
+      </p:sp>
+      <p:sp>
+        <p:nvSpPr>
+          <p:cNvPr id="5" name="TextBox 3"/>
+          <p:cNvSpPr txBox="1"/>
+          <p:nvPr/>
+        </p:nvSpPr>
+        <p:spPr>
+          <a:xfrm>
+            <a:off x="3568700" y="4076700"/>
+            <a:ext cx="5105400" cy="508000"/>
+          </a:xfrm>
+          <a:prstGeom prst="rect">
+            <a:avLst/>
+          </a:prstGeom>
+          <a:noFill/>
+        </p:spPr>
+        <p:txBody>
+          <a:bodyPr/>
+          <a:lstStyle/>
+          <a:p>
+            <a:pPr marL="0" lvl="0" indent="0" algn="ctr">
+              <a:buNone/>
+            </a:pPr>
+            <a:r>
+              <a:t>API Response</a:t>
+            </a:r>
+          </a:p>
+        </p:txBody>
+      </p:sp>
+      <p:pic>
+        <p:nvPicPr>
+          <p:cNvPr id="11" name="Picture 10" descr="A screenshot of a video&#10;&#10;AI-generated content may be incorrect.">
+            <a:extLst>
+              <a:ext uri="{FF2B5EF4-FFF2-40B4-BE49-F238E27FC236}">
+                <a16:creationId xmlns:a16="http://schemas.microsoft.com/office/drawing/2014/main" id="{CE0D2098-8B7F-B423-FB5F-ED3105D56BEC}"/>
+              </a:ext>
+            </a:extLst>
+          </p:cNvPr>
+          <p:cNvPicPr>
+            <a:picLocks noChangeAspect="1"/>
+          </p:cNvPicPr>
+          <p:nvPr/>
+        </p:nvPicPr>
+        <p:blipFill>
+          <a:blip r:embed="rId2"/>
+          <a:stretch>
+            <a:fillRect/>
+          </a:stretch>
+        </p:blipFill>
+        <p:spPr>
+          <a:xfrm>
+            <a:off x="3752153" y="207863"/>
+            <a:ext cx="5144583" cy="2201722"/>
+          </a:xfrm>
+          <a:prstGeom prst="rect">
+            <a:avLst/>
+          </a:prstGeom>
+        </p:spPr>
+      </p:pic>
+      <p:pic>
+        <p:nvPicPr>
+          <p:cNvPr id="9" name="Picture 8" descr="A screenshot of a computer&#10;&#10;AI-generated content may be incorrect.">
+            <a:extLst>
+              <a:ext uri="{FF2B5EF4-FFF2-40B4-BE49-F238E27FC236}">
+                <a16:creationId xmlns:a16="http://schemas.microsoft.com/office/drawing/2014/main" id="{1266F506-31A6-192A-4A4E-291973C3C9B0}"/>
+              </a:ext>
+            </a:extLst>
+          </p:cNvPr>
+          <p:cNvPicPr>
+            <a:picLocks noChangeAspect="1"/>
+          </p:cNvPicPr>
+          <p:nvPr/>
+        </p:nvPicPr>
+        <p:blipFill>
+          <a:blip r:embed="rId3"/>
+          <a:stretch>
+            <a:fillRect/>
+          </a:stretch>
+        </p:blipFill>
+        <p:spPr>
+          <a:xfrm>
+            <a:off x="3752153" y="1265706"/>
+            <a:ext cx="5144583" cy="2612087"/>
+          </a:xfrm>
+          <a:prstGeom prst="rect">
+            <a:avLst/>
+          </a:prstGeom>
+        </p:spPr>
+      </p:pic>
+    </p:spTree>
+  </p:cSld>
+  <p:clrMapOvr>
+    <a:masterClrMapping/>
+  </p:clrMapOvr>
+</p:sld>
 </file>
 
 <file path=ppt/slides/slide7.xml><?xml version="1.0" encoding="utf-8"?>
-<ns0:sld xmlns:ns0="http://schemas.openxmlformats.org/presentationml/2006/main" xmlns:ns1="http://schemas.openxmlformats.org/drawingml/2006/main">
-  <ns0:cSld>
-    <ns0:spTree>
-      <ns0:nvGrpSpPr>
-        <ns0:cNvPr id="1" name=""/>
-        <ns0:cNvGrpSpPr/>
-        <ns0:nvPr/>
-      </ns0:nvGrpSpPr>
-      <ns0:grpSpPr>
-        <ns1:xfrm>
-          <ns1:off x="0" y="0"/>
-          <ns1:ext cx="0" cy="0"/>
-          <ns1:chOff x="0" y="0"/>
-          <ns1:chExt cx="0" cy="0"/>
-        </ns1:xfrm>
-      </ns0:grpSpPr>
-      <ns0:sp>
-        <ns0:nvSpPr>
-          <ns0:cNvPr id="2" name="Title 1"/>
-          <ns0:cNvSpPr>
-            <ns1:spLocks noGrp="1"/>
-          </ns0:cNvSpPr>
-          <ns0:nvPr>
-            <ns0:ph type="title"/>
-          </ns0:nvPr>
-        </ns0:nvSpPr>
-        <ns0:spPr/>
-        <ns0:txBody>
-          <ns1:bodyPr/>
-          <ns1:lstStyle/>
-          <ns1:p>
-            <ns1:pPr lvl="0" indent="0" marL="0">
-              <ns1:buNone/>
-            </ns1:pPr>
-            <ns1:r>
-              <ns1:rPr/>
-              <ns1:t>Approach from Proposal to Build</ns1:t>
-            </ns1:r>
-          </ns1:p>
-        </ns0:txBody>
-      </ns0:sp>
-      <ns0:sp>
-        <ns0:nvSpPr>
-          <ns0:cNvPr id="3" name="Content Placeholder 2"/>
-          <ns0:cNvSpPr>
-            <ns1:spLocks noGrp="1"/>
-          </ns0:cNvSpPr>
-          <ns0:nvPr>
-            <ns0:ph idx="1"/>
-          </ns0:nvPr>
-        </ns0:nvSpPr>
-        <ns0:spPr/>
-        <ns0:txBody>
-          <ns1:bodyPr/>
-          <ns1:lstStyle/>
-          <ns1:p>
-            <ns1:pPr lvl="0"/>
-            <ns1:r>
-              <ns1:rPr/>
-              <ns1:t>Proposal goal: RAG-based bilingual assistant with citations.</ns1:t>
-            </ns1:r>
-          </ns1:p>
-          <ns1:p>
-            <ns1:pPr lvl="0"/>
-            <ns1:r>
-              <ns1:rPr/>
-              <ns1:t>Implemented practical hybrid strategy:</ns1:t>
-            </ns1:r>
-          </ns1:p>
-          <ns1:p>
-            <ns1:pPr lvl="1"/>
-            <ns1:r>
-              <ns1:rPr/>
-              <ns1:t>Rule-based first</ns1:t>
-            </ns1:r>
-          </ns1:p>
-          <ns1:p>
-            <ns1:pPr lvl="1"/>
-            <ns1:r>
-              <ns1:rPr/>
-              <ns1:t>Retrieval relevance check second</ns1:t>
-            </ns1:r>
-          </ns1:p>
-          <ns1:p>
-            <ns1:pPr lvl="1"/>
-            <ns1:r>
-              <ns1:rPr/>
-              <ns1:t>RAG path for in-domain queries; general LLM path for out-of-domain queries</ns1:t>
-            </ns1:r>
-          </ns1:p>
-          <ns1:p>
-            <ns1:pPr lvl="0"/>
-            <ns1:r>
-              <ns1:rPr/>
-              <ns1:t>Reason: better reliability, lower cost/latency, graceful degradation.</ns1:t>
-            </ns1:r>
-          </ns1:p>
-        </ns0:txBody>
-      </ns0:sp>
-    </ns0:spTree>
-  </ns0:cSld>
-</ns0:sld>
+<p:sld xmlns:a="http://schemas.openxmlformats.org/drawingml/2006/main" xmlns:r="http://schemas.openxmlformats.org/officeDocument/2006/relationships" xmlns:p="http://schemas.openxmlformats.org/presentationml/2006/main">
+  <p:cSld>
+    <p:spTree>
+      <p:nvGrpSpPr>
+        <p:cNvPr id="1" name=""/>
+        <p:cNvGrpSpPr/>
+        <p:nvPr/>
+      </p:nvGrpSpPr>
+      <p:grpSpPr>
+        <a:xfrm>
+          <a:off x="0" y="0"/>
+          <a:ext cx="0" cy="0"/>
+          <a:chOff x="0" y="0"/>
+          <a:chExt cx="0" cy="0"/>
+        </a:xfrm>
+      </p:grpSpPr>
+      <p:sp>
+        <p:nvSpPr>
+          <p:cNvPr id="2" name="Title 1"/>
+          <p:cNvSpPr>
+            <a:spLocks noGrp="1"/>
+          </p:cNvSpPr>
+          <p:nvPr>
+            <p:ph type="title"/>
+          </p:nvPr>
+        </p:nvSpPr>
+        <p:spPr/>
+        <p:txBody>
+          <a:bodyPr/>
+          <a:lstStyle/>
+          <a:p>
+            <a:pPr marL="0" lvl="0" indent="0">
+              <a:buNone/>
+            </a:pPr>
+            <a:r>
+              <a:t>Approach from Proposal to Build</a:t>
+            </a:r>
+          </a:p>
+        </p:txBody>
+      </p:sp>
+      <p:sp>
+        <p:nvSpPr>
+          <p:cNvPr id="3" name="Content Placeholder 2"/>
+          <p:cNvSpPr>
+            <a:spLocks noGrp="1"/>
+          </p:cNvSpPr>
+          <p:nvPr>
+            <p:ph idx="1"/>
+          </p:nvPr>
+        </p:nvSpPr>
+        <p:spPr/>
+        <p:txBody>
+          <a:bodyPr/>
+          <a:lstStyle/>
+          <a:p>
+            <a:pPr lvl="0"/>
+            <a:r>
+              <a:t>Proposal goal: RAG-based bilingual assistant with citations.</a:t>
+            </a:r>
+          </a:p>
+          <a:p>
+            <a:pPr lvl="0"/>
+            <a:r>
+              <a:t>Implemented practical hybrid strategy:</a:t>
+            </a:r>
+          </a:p>
+          <a:p>
+            <a:pPr lvl="1"/>
+            <a:r>
+              <a:t>Rule-based first</a:t>
+            </a:r>
+          </a:p>
+          <a:p>
+            <a:pPr lvl="1"/>
+            <a:r>
+              <a:t>Retrieval relevance check second</a:t>
+            </a:r>
+          </a:p>
+          <a:p>
+            <a:pPr lvl="1"/>
+            <a:r>
+              <a:t>RAG path for in-domain queries; general LLM path for out-of-domain queries</a:t>
+            </a:r>
+          </a:p>
+          <a:p>
+            <a:pPr lvl="0"/>
+            <a:r>
+              <a:t>Reason: better reliability, lower cost/latency, graceful degradation.</a:t>
+            </a:r>
+          </a:p>
+        </p:txBody>
+      </p:sp>
+    </p:spTree>
+  </p:cSld>
+  <p:clrMapOvr>
+    <a:masterClrMapping/>
+  </p:clrMapOvr>
+</p:sld>
 </file>
 
 <file path=ppt/slides/slide8.xml><?xml version="1.0" encoding="utf-8"?>
-<ns0:sld xmlns:ns0="http://schemas.openxmlformats.org/presentationml/2006/main" xmlns:ns1="http://schemas.openxmlformats.org/drawingml/2006/main">
-  <ns0:cSld>
-    <ns0:spTree>
-      <ns0:nvGrpSpPr>
-        <ns0:cNvPr id="1" name=""/>
-        <ns0:cNvGrpSpPr/>
-        <ns0:nvPr/>
-      </ns0:nvGrpSpPr>
-      <ns0:grpSpPr>
-        <ns1:xfrm>
-          <ns1:off x="0" y="0"/>
-          <ns1:ext cx="0" cy="0"/>
-          <ns1:chOff x="0" y="0"/>
-          <ns1:chExt cx="0" cy="0"/>
-        </ns1:xfrm>
-      </ns0:grpSpPr>
-      <ns0:sp>
-        <ns0:nvSpPr>
-          <ns0:cNvPr id="2" name="Title 1"/>
-          <ns0:cNvSpPr>
-            <ns1:spLocks noGrp="1"/>
-          </ns0:cNvSpPr>
-          <ns0:nvPr>
-            <ns0:ph type="title"/>
-          </ns0:nvPr>
-        </ns0:nvSpPr>
-        <ns0:spPr/>
-        <ns0:txBody>
-          <ns1:bodyPr/>
-          <ns1:lstStyle/>
-          <ns1:p>
-            <ns1:pPr lvl="0" indent="0" marL="0">
-              <ns1:buNone/>
-            </ns1:pPr>
-            <ns1:r>
-              <ns1:rPr/>
-              <ns1:t>Challenges Encountered</ns1:t>
-            </ns1:r>
-          </ns1:p>
-        </ns0:txBody>
-      </ns0:sp>
-      <ns0:sp>
-        <ns0:nvSpPr>
-          <ns0:cNvPr id="3" name="Content Placeholder 2"/>
-          <ns0:cNvSpPr>
-            <ns1:spLocks noGrp="1"/>
-          </ns0:cNvSpPr>
-          <ns0:nvPr>
-            <ns0:ph idx="1"/>
-          </ns0:nvPr>
-        </ns0:nvSpPr>
-        <ns0:spPr/>
-        <ns0:txBody>
-          <ns1:bodyPr/>
-          <ns1:lstStyle/>
-          <ns1:p>
-            <ns1:pPr lvl="0"/>
-            <ns1:r>
-              <ns1:rPr/>
-              <ns1:t>Environment/dependency availability varied by runtime.</ns1:t>
-            </ns1:r>
-          </ns1:p>
-          <ns1:p>
-            <ns1:pPr lvl="0"/>
-            <ns1:r>
-              <ns1:rPr/>
-              <ns1:t>Retrieval tuning required trial-and-error (chunk size, similarity thresholds).</ns1:t>
-            </ns1:r>
-          </ns1:p>
-          <ns1:p>
-            <ns1:pPr lvl="0"/>
-            <ns1:r>
-              <ns1:rPr/>
-              <ns1:t>Maintaining concise bilingual quality required prompt calibration.</ns1:t>
-            </ns1:r>
-          </ns1:p>
-          <ns1:p>
-            <ns1:pPr lvl="0"/>
-            <ns1:r>
-              <ns1:rPr/>
-              <ns1:t>Coverage limitations in knowledge base can still produce uncertainty.</ns1:t>
-            </ns1:r>
-          </ns1:p>
-        </ns0:txBody>
-      </ns0:sp>
-    </ns0:spTree>
-  </ns0:cSld>
-</ns0:sld>
+<p:sld xmlns:a="http://schemas.openxmlformats.org/drawingml/2006/main" xmlns:r="http://schemas.openxmlformats.org/officeDocument/2006/relationships" xmlns:p="http://schemas.openxmlformats.org/presentationml/2006/main">
+  <p:cSld>
+    <p:spTree>
+      <p:nvGrpSpPr>
+        <p:cNvPr id="1" name=""/>
+        <p:cNvGrpSpPr/>
+        <p:nvPr/>
+      </p:nvGrpSpPr>
+      <p:grpSpPr>
+        <a:xfrm>
+          <a:off x="0" y="0"/>
+          <a:ext cx="0" cy="0"/>
+          <a:chOff x="0" y="0"/>
+          <a:chExt cx="0" cy="0"/>
+        </a:xfrm>
+      </p:grpSpPr>
+      <p:sp>
+        <p:nvSpPr>
+          <p:cNvPr id="2" name="Title 1"/>
+          <p:cNvSpPr>
+            <a:spLocks noGrp="1"/>
+          </p:cNvSpPr>
+          <p:nvPr>
+            <p:ph type="title"/>
+          </p:nvPr>
+        </p:nvSpPr>
+        <p:spPr/>
+        <p:txBody>
+          <a:bodyPr/>
+          <a:lstStyle/>
+          <a:p>
+            <a:pPr marL="0" lvl="0" indent="0">
+              <a:buNone/>
+            </a:pPr>
+            <a:r>
+              <a:t>Challenges Encountered</a:t>
+            </a:r>
+          </a:p>
+        </p:txBody>
+      </p:sp>
+      <p:sp>
+        <p:nvSpPr>
+          <p:cNvPr id="3" name="Content Placeholder 2"/>
+          <p:cNvSpPr>
+            <a:spLocks noGrp="1"/>
+          </p:cNvSpPr>
+          <p:nvPr>
+            <p:ph idx="1"/>
+          </p:nvPr>
+        </p:nvSpPr>
+        <p:spPr/>
+        <p:txBody>
+          <a:bodyPr/>
+          <a:lstStyle/>
+          <a:p>
+            <a:pPr lvl="0"/>
+            <a:r>
+              <a:t>Environment/dependency availability varied by runtime.</a:t>
+            </a:r>
+          </a:p>
+          <a:p>
+            <a:pPr lvl="0"/>
+            <a:r>
+              <a:t>Retrieval tuning required trial-and-error (chunk size, similarity thresholds).</a:t>
+            </a:r>
+          </a:p>
+          <a:p>
+            <a:pPr lvl="0"/>
+            <a:r>
+              <a:t>Maintaining concise bilingual quality required prompt calibration.</a:t>
+            </a:r>
+          </a:p>
+          <a:p>
+            <a:pPr lvl="0"/>
+            <a:r>
+              <a:t>Coverage limitations in knowledge base can still produce uncertainty.</a:t>
+            </a:r>
+          </a:p>
+        </p:txBody>
+      </p:sp>
+    </p:spTree>
+  </p:cSld>
+  <p:clrMapOvr>
+    <a:masterClrMapping/>
+  </p:clrMapOvr>
+</p:sld>
 </file>
 
 <file path=ppt/slides/slide9.xml><?xml version="1.0" encoding="utf-8"?>
-<ns0:sld xmlns:ns0="http://schemas.openxmlformats.org/presentationml/2006/main" xmlns:ns1="http://schemas.openxmlformats.org/drawingml/2006/main">
-  <ns0:cSld>
-    <ns0:spTree>
-      <ns0:nvGrpSpPr>
-        <ns0:cNvPr id="1" name=""/>
-        <ns0:cNvGrpSpPr/>
-        <ns0:nvPr/>
-      </ns0:nvGrpSpPr>
-      <ns0:grpSpPr>
-        <ns1:xfrm>
-          <ns1:off x="0" y="0"/>
-          <ns1:ext cx="0" cy="0"/>
-          <ns1:chOff x="0" y="0"/>
-          <ns1:chExt cx="0" cy="0"/>
-        </ns1:xfrm>
-      </ns0:grpSpPr>
-      <ns0:sp>
-        <ns0:nvSpPr>
-          <ns0:cNvPr id="2" name="Title 1"/>
-          <ns0:cNvSpPr>
-            <ns1:spLocks noGrp="1"/>
-          </ns0:cNvSpPr>
-          <ns0:nvPr>
-            <ns0:ph type="title"/>
-          </ns0:nvPr>
-        </ns0:nvSpPr>
-        <ns0:spPr/>
-        <ns0:txBody>
-          <ns1:bodyPr/>
-          <ns1:lstStyle/>
-          <ns1:p>
-            <ns1:pPr lvl="0" indent="0" marL="0">
-              <ns1:buNone/>
-            </ns1:pPr>
-            <ns1:r>
-              <ns1:rPr/>
-              <ns1:t>Key Learnings</ns1:t>
-            </ns1:r>
-          </ns1:p>
-        </ns0:txBody>
-      </ns0:sp>
-      <ns0:sp>
-        <ns0:nvSpPr>
-          <ns0:cNvPr id="3" name="Content Placeholder 2"/>
-          <ns0:cNvSpPr>
-            <ns1:spLocks noGrp="1"/>
-          </ns0:cNvSpPr>
-          <ns0:nvPr>
-            <ns0:ph idx="1"/>
-          </ns0:nvPr>
-        </ns0:nvSpPr>
-        <ns0:spPr/>
-        <ns0:txBody>
-          <ns1:bodyPr/>
-          <ns1:lstStyle/>
-          <ns1:p>
-            <ns1:pPr lvl="0"/>
-            <ns1:r>
-              <ns1:rPr/>
-              <ns1:t>Hybrid architecture outperforms pure-LLM in reliability for scoped domains.</ns1:t>
-            </ns1:r>
-          </ns1:p>
-          <ns1:p>
-            <ns1:pPr lvl="0"/>
-            <ns1:r>
-              <ns1:rPr/>
-              <ns1:t>Clean layer separation improves maintainability and debugging speed.</ns1:t>
-            </ns1:r>
-          </ns1:p>
-          <ns1:p>
-            <ns1:pPr lvl="0"/>
-            <ns1:r>
-              <ns1:rPr/>
-              <ns1:t>RAG quality depends heavily on data chunking and retrieval thresholds.</ns1:t>
-            </ns1:r>
-          </ns1:p>
-          <ns1:p>
-            <ns1:pPr lvl="0"/>
-            <ns1:r>
-              <ns1:rPr/>
-              <ns1:t>Fallback behavior is critical for user trust.</ns1:t>
-            </ns1:r>
-          </ns1:p>
-        </ns0:txBody>
-      </ns0:sp>
-    </ns0:spTree>
-  </ns0:cSld>
-</ns0:sld>
+<p:sld xmlns:a="http://schemas.openxmlformats.org/drawingml/2006/main" xmlns:r="http://schemas.openxmlformats.org/officeDocument/2006/relationships" xmlns:p="http://schemas.openxmlformats.org/presentationml/2006/main">
+  <p:cSld>
+    <p:spTree>
+      <p:nvGrpSpPr>
+        <p:cNvPr id="1" name=""/>
+        <p:cNvGrpSpPr/>
+        <p:nvPr/>
+      </p:nvGrpSpPr>
+      <p:grpSpPr>
+        <a:xfrm>
+          <a:off x="0" y="0"/>
+          <a:ext cx="0" cy="0"/>
+          <a:chOff x="0" y="0"/>
+          <a:chExt cx="0" cy="0"/>
+        </a:xfrm>
+      </p:grpSpPr>
+      <p:sp>
+        <p:nvSpPr>
+          <p:cNvPr id="2" name="Title 1"/>
+          <p:cNvSpPr>
+            <a:spLocks noGrp="1"/>
+          </p:cNvSpPr>
+          <p:nvPr>
+            <p:ph type="title"/>
+          </p:nvPr>
+        </p:nvSpPr>
+        <p:spPr/>
+        <p:txBody>
+          <a:bodyPr/>
+          <a:lstStyle/>
+          <a:p>
+            <a:pPr marL="0" lvl="0" indent="0">
+              <a:buNone/>
+            </a:pPr>
+            <a:r>
+              <a:t>Key Learnings</a:t>
+            </a:r>
+          </a:p>
+        </p:txBody>
+      </p:sp>
+      <p:sp>
+        <p:nvSpPr>
+          <p:cNvPr id="3" name="Content Placeholder 2"/>
+          <p:cNvSpPr>
+            <a:spLocks noGrp="1"/>
+          </p:cNvSpPr>
+          <p:nvPr>
+            <p:ph idx="1"/>
+          </p:nvPr>
+        </p:nvSpPr>
+        <p:spPr/>
+        <p:txBody>
+          <a:bodyPr/>
+          <a:lstStyle/>
+          <a:p>
+            <a:pPr lvl="0"/>
+            <a:r>
+              <a:t>Hybrid architecture outperforms pure-LLM in reliability for scoped domains.</a:t>
+            </a:r>
+          </a:p>
+          <a:p>
+            <a:pPr lvl="0"/>
+            <a:r>
+              <a:t>Clean layer separation improves maintainability and debugging speed.</a:t>
+            </a:r>
+          </a:p>
+          <a:p>
+            <a:pPr lvl="0"/>
+            <a:r>
+              <a:t>RAG quality depends heavily on data chunking and retrieval thresholds.</a:t>
+            </a:r>
+          </a:p>
+          <a:p>
+            <a:pPr lvl="0"/>
+            <a:r>
+              <a:t>Fallback behavior is critical for user trust.</a:t>
+            </a:r>
+          </a:p>
+        </p:txBody>
+      </p:sp>
+    </p:spTree>
+  </p:cSld>
+  <p:clrMapOvr>
+    <a:masterClrMapping/>
+  </p:clrMapOvr>
+</p:sld>
 </file>
 
 <file path=ppt/theme/theme1.xml><?xml version="1.0" encoding="utf-8"?>
@@ -4552,265 +4559,4 @@
   </a:objectDefaults>
   <a:extraClrSchemeLst/>
 </a:theme>
-</file>
-
-<file path=ppt/theme/theme2.xml><?xml version="1.0" encoding="utf-8"?>
-<a:theme xmlns:a="http://schemas.openxmlformats.org/drawingml/2006/main" name="Office Theme">
-  <a:themeElements>
-    <a:clrScheme name="Office">
-      <a:dk1>
-        <a:sysClr val="windowText" lastClr="000000"/>
-      </a:dk1>
-      <a:lt1>
-        <a:sysClr val="window" lastClr="FFFFFF"/>
-      </a:lt1>
-      <a:dk2>
-        <a:srgbClr val="44546A"/>
-      </a:dk2>
-      <a:lt2>
-        <a:srgbClr val="E7E6E6"/>
-      </a:lt2>
-      <a:accent1>
-        <a:srgbClr val="5B9BD5"/>
-      </a:accent1>
-      <a:accent2>
-        <a:srgbClr val="ED7D31"/>
-      </a:accent2>
-      <a:accent3>
-        <a:srgbClr val="A5A5A5"/>
-      </a:accent3>
-      <a:accent4>
-        <a:srgbClr val="FFC000"/>
-      </a:accent4>
-      <a:accent5>
-        <a:srgbClr val="4472C4"/>
-      </a:accent5>
-      <a:accent6>
-        <a:srgbClr val="70AD47"/>
-      </a:accent6>
-      <a:hlink>
-        <a:srgbClr val="0563C1"/>
-      </a:hlink>
-      <a:folHlink>
-        <a:srgbClr val="954F72"/>
-      </a:folHlink>
-    </a:clrScheme>
-    <a:fontScheme name="Office">
-      <a:majorFont>
-        <a:latin typeface="Calibri Light" panose="020F0302020204030204"/>
-        <a:ea typeface=""/>
-        <a:cs typeface=""/>
-        <a:font script="Jpan" typeface="ＭＳ Ｐゴシック"/>
-        <a:font script="Hang" typeface="맑은 고딕"/>
-        <a:font script="Hans" typeface="宋体"/>
-        <a:font script="Hant" typeface="新細明體"/>
-        <a:font script="Arab" typeface="Times New Roman"/>
-        <a:font script="Hebr" typeface="Times New Roman"/>
-        <a:font script="Thai" typeface="Angsana New"/>
-        <a:font script="Ethi" typeface="Nyala"/>
-        <a:font script="Beng" typeface="Vrinda"/>
-        <a:font script="Gujr" typeface="Shruti"/>
-        <a:font script="Khmr" typeface="MoolBoran"/>
-        <a:font script="Knda" typeface="Tunga"/>
-        <a:font script="Guru" typeface="Raavi"/>
-        <a:font script="Cans" typeface="Euphemia"/>
-        <a:font script="Cher" typeface="Plantagenet Cherokee"/>
-        <a:font script="Yiii" typeface="Microsoft Yi Baiti"/>
-        <a:font script="Tibt" typeface="Microsoft Himalaya"/>
-        <a:font script="Thaa" typeface="MV Boli"/>
-        <a:font script="Deva" typeface="Mangal"/>
-        <a:font script="Telu" typeface="Gautami"/>
-        <a:font script="Taml" typeface="Latha"/>
-        <a:font script="Syrc" typeface="Estrangelo Edessa"/>
-        <a:font script="Orya" typeface="Kalinga"/>
-        <a:font script="Mlym" typeface="Kartika"/>
-        <a:font script="Laoo" typeface="DokChampa"/>
-        <a:font script="Sinh" typeface="Iskoola Pota"/>
-        <a:font script="Mong" typeface="Mongolian Baiti"/>
-        <a:font script="Viet" typeface="Times New Roman"/>
-        <a:font script="Uigh" typeface="Microsoft Uighur"/>
-        <a:font script="Geor" typeface="Sylfaen"/>
-      </a:majorFont>
-      <a:minorFont>
-        <a:latin typeface="Calibri" panose="020F0502020204030204"/>
-        <a:ea typeface=""/>
-        <a:cs typeface=""/>
-        <a:font script="Jpan" typeface="ＭＳ Ｐゴシック"/>
-        <a:font script="Hang" typeface="맑은 고딕"/>
-        <a:font script="Hans" typeface="宋体"/>
-        <a:font script="Hant" typeface="新細明體"/>
-        <a:font script="Arab" typeface="Arial"/>
-        <a:font script="Hebr" typeface="Arial"/>
-        <a:font script="Thai" typeface="Cordia New"/>
-        <a:font script="Ethi" typeface="Nyala"/>
-        <a:font script="Beng" typeface="Vrinda"/>
-        <a:font script="Gujr" typeface="Shruti"/>
-        <a:font script="Khmr" typeface="DaunPenh"/>
-        <a:font script="Knda" typeface="Tunga"/>
-        <a:font script="Guru" typeface="Raavi"/>
-        <a:font script="Cans" typeface="Euphemia"/>
-        <a:font script="Cher" typeface="Plantagenet Cherokee"/>
-        <a:font script="Yiii" typeface="Microsoft Yi Baiti"/>
-        <a:font script="Tibt" typeface="Microsoft Himalaya"/>
-        <a:font script="Thaa" typeface="MV Boli"/>
-        <a:font script="Deva" typeface="Mangal"/>
-        <a:font script="Telu" typeface="Gautami"/>
-        <a:font script="Taml" typeface="Latha"/>
-        <a:font script="Syrc" typeface="Estrangelo Edessa"/>
-        <a:font script="Orya" typeface="Kalinga"/>
-        <a:font script="Mlym" typeface="Kartika"/>
-        <a:font script="Laoo" typeface="DokChampa"/>
-        <a:font script="Sinh" typeface="Iskoola Pota"/>
-        <a:font script="Mong" typeface="Mongolian Baiti"/>
-        <a:font script="Viet" typeface="Arial"/>
-        <a:font script="Uigh" typeface="Microsoft Uighur"/>
-        <a:font script="Geor" typeface="Sylfaen"/>
-      </a:minorFont>
-    </a:fontScheme>
-    <a:fmtScheme name="Office">
-      <a:fillStyleLst>
-        <a:solidFill>
-          <a:schemeClr val="phClr"/>
-        </a:solidFill>
-        <a:gradFill rotWithShape="1">
-          <a:gsLst>
-            <a:gs pos="0">
-              <a:schemeClr val="phClr">
-                <a:lumMod val="110000"/>
-                <a:satMod val="105000"/>
-                <a:tint val="67000"/>
-              </a:schemeClr>
-            </a:gs>
-            <a:gs pos="50000">
-              <a:schemeClr val="phClr">
-                <a:lumMod val="105000"/>
-                <a:satMod val="103000"/>
-                <a:tint val="73000"/>
-              </a:schemeClr>
-            </a:gs>
-            <a:gs pos="100000">
-              <a:schemeClr val="phClr">
-                <a:lumMod val="105000"/>
-                <a:satMod val="109000"/>
-                <a:tint val="81000"/>
-              </a:schemeClr>
-            </a:gs>
-          </a:gsLst>
-          <a:lin ang="5400000" scaled="0"/>
-        </a:gradFill>
-        <a:gradFill rotWithShape="1">
-          <a:gsLst>
-            <a:gs pos="0">
-              <a:schemeClr val="phClr">
-                <a:satMod val="103000"/>
-                <a:lumMod val="102000"/>
-                <a:tint val="94000"/>
-              </a:schemeClr>
-            </a:gs>
-            <a:gs pos="50000">
-              <a:schemeClr val="phClr">
-                <a:satMod val="110000"/>
-                <a:lumMod val="100000"/>
-                <a:shade val="100000"/>
-              </a:schemeClr>
-            </a:gs>
-            <a:gs pos="100000">
-              <a:schemeClr val="phClr">
-                <a:lumMod val="99000"/>
-                <a:satMod val="120000"/>
-                <a:shade val="78000"/>
-              </a:schemeClr>
-            </a:gs>
-          </a:gsLst>
-          <a:lin ang="5400000" scaled="0"/>
-        </a:gradFill>
-      </a:fillStyleLst>
-      <a:lnStyleLst>
-        <a:ln w="6350" cap="flat" cmpd="sng" algn="ctr">
-          <a:solidFill>
-            <a:schemeClr val="phClr"/>
-          </a:solidFill>
-          <a:prstDash val="solid"/>
-          <a:miter lim="800000"/>
-        </a:ln>
-        <a:ln w="12700" cap="flat" cmpd="sng" algn="ctr">
-          <a:solidFill>
-            <a:schemeClr val="phClr"/>
-          </a:solidFill>
-          <a:prstDash val="solid"/>
-          <a:miter lim="800000"/>
-        </a:ln>
-        <a:ln w="19050" cap="flat" cmpd="sng" algn="ctr">
-          <a:solidFill>
-            <a:schemeClr val="phClr"/>
-          </a:solidFill>
-          <a:prstDash val="solid"/>
-          <a:miter lim="800000"/>
-        </a:ln>
-      </a:lnStyleLst>
-      <a:effectStyleLst>
-        <a:effectStyle>
-          <a:effectLst/>
-        </a:effectStyle>
-        <a:effectStyle>
-          <a:effectLst/>
-        </a:effectStyle>
-        <a:effectStyle>
-          <a:effectLst>
-            <a:outerShdw blurRad="57150" dist="19050" dir="5400000" algn="ctr" rotWithShape="0">
-              <a:srgbClr val="000000">
-                <a:alpha val="63000"/>
-              </a:srgbClr>
-            </a:outerShdw>
-          </a:effectLst>
-        </a:effectStyle>
-      </a:effectStyleLst>
-      <a:bgFillStyleLst>
-        <a:solidFill>
-          <a:schemeClr val="phClr"/>
-        </a:solidFill>
-        <a:solidFill>
-          <a:schemeClr val="phClr">
-            <a:tint val="95000"/>
-            <a:satMod val="170000"/>
-          </a:schemeClr>
-        </a:solidFill>
-        <a:gradFill rotWithShape="1">
-          <a:gsLst>
-            <a:gs pos="0">
-              <a:schemeClr val="phClr">
-                <a:tint val="93000"/>
-                <a:satMod val="150000"/>
-                <a:shade val="98000"/>
-                <a:lumMod val="102000"/>
-              </a:schemeClr>
-            </a:gs>
-            <a:gs pos="50000">
-              <a:schemeClr val="phClr">
-                <a:tint val="98000"/>
-                <a:satMod val="130000"/>
-                <a:shade val="90000"/>
-                <a:lumMod val="103000"/>
-              </a:schemeClr>
-            </a:gs>
-            <a:gs pos="100000">
-              <a:schemeClr val="phClr">
-                <a:shade val="63000"/>
-                <a:satMod val="120000"/>
-              </a:schemeClr>
-            </a:gs>
-          </a:gsLst>
-          <a:lin ang="5400000" scaled="0"/>
-        </a:gradFill>
-      </a:bgFillStyleLst>
-    </a:fmtScheme>
-  </a:themeElements>
-  <a:objectDefaults/>
-  <a:extraClrSchemeLst/>
-  <a:extLst>
-    <a:ext uri="{05A4C25C-085E-4340-85A3-A5531E510DB2}">
-      <thm15:themeFamily xmlns:thm15="http://schemas.microsoft.com/office/thememl/2012/main" name="Office Theme" id="{62F939B6-93AF-4DB8-9C6B-D6C7DFDC589F}" vid="{4A3C46E8-61CC-4603-A589-7422A47A8E4A}"/>
-    </a:ext>
-  </a:extLst>
-</a:theme>
 </file>